--- a/docs/Building3DHTML_できること.pptx
+++ b/docs/Building3DHTML_できること.pptx
@@ -18,9 +18,10 @@
     <p:sldId id="266" r:id="rId12"/>
     <p:sldId id="267" r:id="rId13"/>
     <p:sldId id="268" r:id="rId14"/>
+    <p:sldId id="269" r:id="rId15"/>
   </p:sldIdLst>
   <p:notesMasterIdLst>
-    <p:notesMasterId r:id="rId15"/>
+    <p:notesMasterId r:id="rId16"/>
   </p:notesMasterIdLst>
   <p:sldSz cx="9144000" cy="5143500"/>
   <p:notesSz cx="5143500" cy="9144000"/>
@@ -119,13 +120,13 @@
   <p:extLst>
     <p:ext uri="{521415D9-36F7-43E2-AB2F-B90AF26B5E84}">
       <p14:sectionLst xmlns:p14="http://schemas.microsoft.com/office/powerpoint/2010/main">
-        <p14:section name="はじめに" id="{7ee5a1d7-7871-745e-8e0c-a971a2b95695}">
+        <p14:section name="はじめに" id="{52456d8d-e116-849e-574f-74e15105966b}">
           <p14:sldIdLst>
             <p14:sldId id="256"/>
             <p14:sldId id="257"/>
           </p14:sldIdLst>
         </p14:section>
-        <p14:section name="できること" id="{c764e468-a0e0-0a32-c0c8-50ba90da5e63}">
+        <p14:section name="できること" id="{05d7bf97-efc9-18bc-786e-f5b7d5d674f9}">
           <p14:sldIdLst>
             <p14:sldId id="258"/>
             <p14:sldId id="259"/>
@@ -134,22 +135,23 @@
             <p14:sldId id="262"/>
           </p14:sldIdLst>
         </p14:section>
-        <p14:section name="使い方" id="{ff86a05b-6a69-7f2e-7ee0-0d7f9d59d3e9}">
+        <p14:section name="使い方" id="{4439a352-d489-5c27-d33e-b70faaef8772}">
           <p14:sldIdLst>
             <p14:sldId id="263"/>
             <p14:sldId id="264"/>
           </p14:sldIdLst>
         </p14:section>
-        <p14:section name="ほかの機能" id="{0747b278-a6a3-3d9a-b428-db56fa8413f7}">
+        <p14:section name="ほかの機能" id="{0a1343b4-330f-b5f2-7834-f29c6e2de872}">
           <p14:sldIdLst>
             <p14:sldId id="265"/>
             <p14:sldId id="266"/>
             <p14:sldId id="267"/>
+            <p14:sldId id="268"/>
           </p14:sldIdLst>
         </p14:section>
-        <p14:section name="まとめ" id="{240f3ebf-a100-dbbf-5fe0-e5fde34bb89e}">
+        <p14:section name="まとめ" id="{8ac89a8a-3813-7f87-6ed7-7831b687a6ed}">
           <p14:sldIdLst>
-            <p14:sldId id="268"/>
+            <p14:sldId id="269"/>
           </p14:sldIdLst>
         </p14:section>
       </p14:sectionLst>
@@ -732,7 +734,7 @@
           <a:p>
             <a:r>
               <a:rPr lang="en-US" dirty="0"/>
-              <a:t>PLATEAUの建物を「周辺の建物」に使うと、自分のデータのまわりの街並みを灰色で表示できます。</a:t>
+              <a:t>照合の完了画面の「確認しながら直す…」で、QGISの右側にこのパネルが開きます。施設の点がズレていて、隣の建物に当たってしまった場合などに使います。保存するまでは編集中なので、QGISの「編集を取り消す」で全部やめることもできます。</a:t>
             </a:r>
             <a:endParaRPr lang="en-US" dirty="0"/>
           </a:p>
@@ -820,7 +822,7 @@
           <a:p>
             <a:r>
               <a:rPr lang="en-US" dirty="0"/>
-              <a:t>いまは試作版（0.1）です。よく使う機能から順に足していく予定です。</a:t>
+              <a:t>PLATEAUの建物を「周辺の建物」に使うと、自分のデータのまわりの街並みを灰色で表示できます。</a:t>
             </a:r>
             <a:endParaRPr lang="en-US" dirty="0"/>
           </a:p>
@@ -908,7 +910,7 @@
           <a:p>
             <a:r>
               <a:rPr lang="en-US" dirty="0"/>
-              <a:t>まずは手元の建物データで1つ書き出して、ブラウザで開いてみてください。</a:t>
+              <a:t>いまは試作版（0.1）です。よく使う機能から順に足していく予定です。</a:t>
             </a:r>
             <a:endParaRPr lang="en-US" dirty="0"/>
           </a:p>
@@ -932,6 +934,94 @@
             <a:fld id="{F7021451-1387-4CA6-816F-3879F97B5CBC}" type="slidenum">
               <a:rPr lang="en-US"/>
               <a:t>13</a:t>
+            </a:fld>
+            <a:endParaRPr lang="en-US"/>
+          </a:p>
+        </p:txBody>
+      </p:sp>
+    </p:spTree>
+    <p:extLst>
+      <p:ext uri="{BB962C8B-B14F-4D97-AF65-F5344CB8AC3E}">
+        <p14:creationId xmlns:p14="http://schemas.microsoft.com/office/powerpoint/2010/main" val="1024086991"/>
+      </p:ext>
+    </p:extLst>
+  </p:cSld>
+  <p:clrMapOvr>
+    <a:masterClrMapping/>
+  </p:clrMapOvr>
+</p:notes>
+</file>
+
+<file path=ppt/notesSlides/notesSlide14.xml><?xml version="1.0" encoding="utf-8"?>
+<p:notes xmlns:a="http://schemas.openxmlformats.org/drawingml/2006/main" xmlns:r="http://schemas.openxmlformats.org/officeDocument/2006/relationships" xmlns:p="http://schemas.openxmlformats.org/presentationml/2006/main">
+  <p:cSld>
+    <p:spTree>
+      <p:nvGrpSpPr>
+        <p:cNvPr id="1" name=""/>
+        <p:cNvGrpSpPr/>
+        <p:nvPr/>
+      </p:nvGrpSpPr>
+      <p:grpSpPr>
+        <a:xfrm>
+          <a:off x="0" y="0"/>
+          <a:ext cx="0" cy="0"/>
+          <a:chOff x="0" y="0"/>
+          <a:chExt cx="0" cy="0"/>
+        </a:xfrm>
+      </p:grpSpPr>
+      <p:sp>
+        <p:nvSpPr>
+          <p:cNvPr id="2" name="Slide Image Placeholder 1"/>
+          <p:cNvSpPr>
+            <a:spLocks noGrp="1" noRot="1" noChangeAspect="1"/>
+          </p:cNvSpPr>
+          <p:nvPr>
+            <p:ph type="sldImg"/>
+          </p:nvPr>
+        </p:nvSpPr>
+        <p:spPr/>
+      </p:sp>
+      <p:sp>
+        <p:nvSpPr>
+          <p:cNvPr id="3" name="Notes Placeholder 2"/>
+          <p:cNvSpPr>
+            <a:spLocks noGrp="1"/>
+          </p:cNvSpPr>
+          <p:nvPr>
+            <p:ph type="body" idx="1"/>
+          </p:nvPr>
+        </p:nvSpPr>
+        <p:spPr/>
+        <p:txBody>
+          <a:bodyPr/>
+          <a:lstStyle/>
+          <a:p>
+            <a:r>
+              <a:rPr lang="en-US" dirty="0"/>
+              <a:t>まずは手元の建物データで1つ書き出して、ブラウザで開いてみてください。</a:t>
+            </a:r>
+            <a:endParaRPr lang="en-US" dirty="0"/>
+          </a:p>
+        </p:txBody>
+      </p:sp>
+      <p:sp>
+        <p:nvSpPr>
+          <p:cNvPr id="4" name="Slide Number Placeholder 3"/>
+          <p:cNvSpPr>
+            <a:spLocks noGrp="1"/>
+          </p:cNvSpPr>
+          <p:nvPr>
+            <p:ph type="sldNum" sz="quarter" idx="10"/>
+          </p:nvPr>
+        </p:nvSpPr>
+        <p:spPr/>
+        <p:txBody>
+          <a:bodyPr/>
+          <a:lstStyle/>
+          <a:p>
+            <a:fld id="{F7021451-1387-4CA6-816F-3879F97B5CBC}" type="slidenum">
+              <a:rPr lang="en-US"/>
+              <a:t>14</a:t>
             </a:fld>
             <a:endParaRPr lang="en-US"/>
           </a:p>
@@ -3087,7 +3177,7 @@
                   <a:schemeClr val="bg1"/>
                 </a:solidFill>
               </a:rPr>
-              <a:t>建物の形に「建物の列＋施設の列＋判定」を付けた新しいレイヤ。1つの建物に施設が複数あれば1棟にまとめ、施設の値を「 / 」でつなぎ「施設数」を付けます。距離（30m）は変えられます。</a:t>
+              <a:t>建物の形に「建物の列＋施設の列＋判定」を付けた新しいレイヤ。1つの建物に施設が複数あれば1棟にまとめ、施設の値を「 / 」でつなぎ「施設数」を付けます。要確認は次のページの方法で直せます。</a:t>
             </a:r>
             <a:endParaRPr lang="en-US" sz="1100" dirty="0"/>
           </a:p>
@@ -3195,37 +3285,15 @@
                   <a:schemeClr val="tx2"/>
                 </a:solidFill>
               </a:rPr>
-              <a:t>PLATEAU の建物データでも使える</a:t>
+              <a:t>要確認は、地図で見ながら1件ずつ直せる</a:t>
             </a:r>
             <a:endParaRPr lang="en-US" sz="2800" dirty="0"/>
           </a:p>
         </p:txBody>
-      </p:sp>
-      <p:sp>
-        <p:nvSpPr>
-          <p:cNvPr id="3" name="icon tile"/>
-          <p:cNvSpPr/>
-          <p:nvPr/>
-        </p:nvSpPr>
-        <p:spPr>
-          <a:xfrm>
-            <a:off x="457200" y="1188720"/>
-            <a:ext cx="1005840" cy="1005840"/>
-          </a:xfrm>
-          <a:prstGeom prst="roundRect">
-            <a:avLst>
-              <a:gd name="adj" fmla="val 22000"/>
-            </a:avLst>
-          </a:prstGeom>
-          <a:solidFill>
-            <a:schemeClr val="tx2"/>
-          </a:solidFill>
-          <a:ln/>
-        </p:spPr>
       </p:sp>
       <p:pic>
         <p:nvPicPr>
-          <p:cNvPr id="4" name="Image 0" descr="FaCity">    </p:cNvPr>
+          <p:cNvPr id="3" name="Image 0" descr="照合の確認・修正パネルの画面">    </p:cNvPr>
           <p:cNvPicPr>
             <a:picLocks noChangeAspect="1"/>
           </p:cNvPicPr>
@@ -3239,135 +3307,149 @@
         </p:blipFill>
         <p:spPr>
           <a:xfrm>
-            <a:off x="698602" y="1430122"/>
-            <a:ext cx="523037" cy="523037"/>
-          </a:xfrm>
-          <a:prstGeom prst="rect">
-            <a:avLst/>
-          </a:prstGeom>
+            <a:off x="457200" y="1097280"/>
+            <a:ext cx="5120640" cy="2999232"/>
+          </a:xfrm>
+          <a:prstGeom prst="rect">
+            <a:avLst/>
+          </a:prstGeom>
+          <a:effectLst>
+            <a:outerShdw sx="100000" sy="100000" kx="0" ky="0" algn="bl" rotWithShape="0" blurRad="101600" dist="25400" dir="5400000">
+              <a:srgbClr val="1E2A33">
+                <a:alpha val="18000"/>
+              </a:srgbClr>
+            </a:outerShdw>
+          </a:effectLst>
         </p:spPr>
       </p:pic>
       <p:sp>
         <p:nvSpPr>
-          <p:cNvPr id="5" name="Text 2"/>
+          <p:cNvPr id="4" name="Text 1"/>
           <p:cNvSpPr txBox="1"/>
           <p:nvPr/>
         </p:nvSpPr>
         <p:spPr>
           <a:xfrm>
-            <a:off x="1691640" y="1188720"/>
-            <a:ext cx="6949440" cy="1005840"/>
-          </a:xfrm>
-          <a:prstGeom prst="rect">
-            <a:avLst/>
-          </a:prstGeom>
-          <a:noFill/>
-          <a:ln/>
-        </p:spPr>
-        <p:txBody>
-          <a:bodyPr wrap="square" lIns="0" tIns="0" rIns="0" bIns="0" rtlCol="0" anchor="ctr"/>
+            <a:off x="457200" y="4187952"/>
+            <a:ext cx="5120640" cy="274320"/>
+          </a:xfrm>
+          <a:prstGeom prst="rect">
+            <a:avLst/>
+          </a:prstGeom>
+          <a:noFill/>
+          <a:ln/>
+        </p:spPr>
+        <p:txBody>
+          <a:bodyPr wrap="square" lIns="0" tIns="0" rIns="0" bIns="0" rtlCol="0" anchor="t"/>
           <a:lstStyle/>
           <a:p>
             <a:pPr indent="0" marL="0">
               <a:buNone/>
             </a:pPr>
             <a:r>
-              <a:rPr lang="en-US" sz="1400" b="1" dirty="0">
-                <a:solidFill>
-                  <a:schemeClr val="tx2"/>
-                </a:solidFill>
-              </a:rPr>
-              <a:t>国土交通省の3D都市モデル PLATEAU を、QGISに読み込んで使えます。</a:t>
-            </a:r>
-            <a:endParaRPr lang="en-US" sz="1400" dirty="0"/>
-          </a:p>
-          <a:p>
-            <a:pPr indent="0" marL="0">
-              <a:buNone/>
-            </a:pPr>
-            <a:r>
-              <a:rPr lang="en-US" sz="1400" dirty="0">
-                <a:solidFill>
-                  <a:schemeClr val="tx1"/>
-                </a:solidFill>
-              </a:rPr>
-              <a:t>高さの列は measuredHeight が自動で選ばれます。</a:t>
-            </a:r>
-            <a:endParaRPr lang="en-US" sz="1400" dirty="0"/>
-          </a:p>
-        </p:txBody>
-      </p:sp>
-      <p:sp>
-        <p:nvSpPr>
-          <p:cNvPr id="6" name="number 1"/>
+              <a:rPr lang="en-US" sz="1000" dirty="0">
+                <a:solidFill>
+                  <a:schemeClr val="accent5"/>
+                </a:solidFill>
+              </a:rPr>
+              <a:t>赤い丸＝施設の点　オレンジ＝当てはめる建物</a:t>
+            </a:r>
+            <a:endParaRPr lang="en-US" sz="1000" dirty="0"/>
+          </a:p>
+        </p:txBody>
+      </p:sp>
+      <p:sp>
+        <p:nvSpPr>
+          <p:cNvPr id="5" name="icon tile"/>
           <p:cNvSpPr/>
           <p:nvPr/>
         </p:nvSpPr>
         <p:spPr>
           <a:xfrm>
-            <a:off x="457200" y="2514600"/>
-            <a:ext cx="329184" cy="329184"/>
-          </a:xfrm>
-          <a:prstGeom prst="ellipse">
-            <a:avLst/>
+            <a:off x="5852160" y="1097280"/>
+            <a:ext cx="502920" cy="502920"/>
+          </a:xfrm>
+          <a:prstGeom prst="roundRect">
+            <a:avLst>
+              <a:gd name="adj" fmla="val 22000"/>
+            </a:avLst>
           </a:prstGeom>
           <a:solidFill>
             <a:schemeClr val="accent1"/>
           </a:solidFill>
-          <a:ln w="19050">
-            <a:solidFill>
-              <a:schemeClr val="bg1"/>
-            </a:solidFill>
-            <a:prstDash val="solid"/>
-          </a:ln>
-        </p:spPr>
-      </p:sp>
-      <p:sp>
-        <p:nvSpPr>
-          <p:cNvPr id="7" name="Text 4"/>
+          <a:ln/>
+        </p:spPr>
+      </p:sp>
+      <p:pic>
+        <p:nvPicPr>
+          <p:cNvPr id="6" name="Image 1" descr="FaCheckCircle">    </p:cNvPr>
+          <p:cNvPicPr>
+            <a:picLocks noChangeAspect="1"/>
+          </p:cNvPicPr>
+          <p:nvPr/>
+        </p:nvPicPr>
+        <p:blipFill>
+          <a:blip r:embed="rId2"/>
+          <a:stretch>
+            <a:fillRect/>
+          </a:stretch>
+        </p:blipFill>
+        <p:spPr>
+          <a:xfrm>
+            <a:off x="5972861" y="1217981"/>
+            <a:ext cx="261518" cy="261518"/>
+          </a:xfrm>
+          <a:prstGeom prst="rect">
+            <a:avLst/>
+          </a:prstGeom>
+        </p:spPr>
+      </p:pic>
+      <p:sp>
+        <p:nvSpPr>
+          <p:cNvPr id="7" name="Text 3"/>
           <p:cNvSpPr txBox="1"/>
           <p:nvPr/>
         </p:nvSpPr>
         <p:spPr>
           <a:xfrm>
-            <a:off x="457200" y="2514600"/>
-            <a:ext cx="329184" cy="329184"/>
-          </a:xfrm>
-          <a:prstGeom prst="rect">
-            <a:avLst/>
-          </a:prstGeom>
-          <a:noFill/>
-          <a:ln/>
-        </p:spPr>
-        <p:txBody>
-          <a:bodyPr wrap="square" lIns="0" tIns="0" rIns="0" bIns="0" rtlCol="0" anchor="ctr"/>
-          <a:lstStyle/>
-          <a:p>
-            <a:pPr algn="ctr" indent="0" marL="0">
-              <a:buNone/>
-            </a:pPr>
-            <a:r>
-              <a:rPr lang="en-US" sz="1400" b="1" dirty="0">
-                <a:solidFill>
-                  <a:schemeClr val="bg1"/>
-                </a:solidFill>
-              </a:rPr>
-              <a:t>1</a:t>
-            </a:r>
-            <a:endParaRPr lang="en-US" sz="1400" dirty="0"/>
-          </a:p>
-        </p:txBody>
-      </p:sp>
-      <p:sp>
-        <p:nvSpPr>
-          <p:cNvPr id="8" name="Text 5"/>
+            <a:off x="6492240" y="1097280"/>
+            <a:ext cx="2194560" cy="274320"/>
+          </a:xfrm>
+          <a:prstGeom prst="rect">
+            <a:avLst/>
+          </a:prstGeom>
+          <a:noFill/>
+          <a:ln/>
+        </p:spPr>
+        <p:txBody>
+          <a:bodyPr wrap="square" lIns="0" tIns="0" rIns="0" bIns="0" rtlCol="0" anchor="t"/>
+          <a:lstStyle/>
+          <a:p>
+            <a:pPr indent="0" marL="0">
+              <a:buNone/>
+            </a:pPr>
+            <a:r>
+              <a:rPr lang="en-US" sz="1300" b="1" dirty="0">
+                <a:solidFill>
+                  <a:schemeClr val="tx2"/>
+                </a:solidFill>
+              </a:rPr>
+              <a:t>この建物に決める</a:t>
+            </a:r>
+            <a:endParaRPr lang="en-US" sz="1300" dirty="0"/>
+          </a:p>
+        </p:txBody>
+      </p:sp>
+      <p:sp>
+        <p:nvSpPr>
+          <p:cNvPr id="8" name="Text 4"/>
           <p:cNvSpPr txBox="1"/>
           <p:nvPr/>
         </p:nvSpPr>
         <p:spPr>
           <a:xfrm>
-            <a:off x="914400" y="2542032"/>
-            <a:ext cx="4206240" cy="320040"/>
+            <a:off x="6492240" y="1371600"/>
+            <a:ext cx="2194560" cy="411480"/>
           </a:xfrm>
           <a:prstGeom prst="rect">
             <a:avLst/>
@@ -3383,225 +3465,267 @@
               <a:buNone/>
             </a:pPr>
             <a:r>
-              <a:rPr lang="en-US" sz="1200" dirty="0">
+              <a:rPr lang="en-US" sz="1100" dirty="0">
                 <a:solidFill>
                   <a:schemeClr val="tx1"/>
                 </a:solidFill>
               </a:rPr>
-              <a:t>「PLATEAU QGIS Plugin」（国土交通省）を入れる</a:t>
-            </a:r>
-            <a:endParaRPr lang="en-US" sz="1200" dirty="0"/>
-          </a:p>
-        </p:txBody>
-      </p:sp>
-      <p:sp>
-        <p:nvSpPr>
-          <p:cNvPr id="9" name="number 2"/>
+              <a:t>点を建物の中へ動かす</a:t>
+            </a:r>
+            <a:endParaRPr lang="en-US" sz="1100" dirty="0"/>
+          </a:p>
+        </p:txBody>
+      </p:sp>
+      <p:sp>
+        <p:nvSpPr>
+          <p:cNvPr id="9" name="icon tile"/>
           <p:cNvSpPr/>
           <p:nvPr/>
         </p:nvSpPr>
         <p:spPr>
           <a:xfrm>
-            <a:off x="457200" y="3017520"/>
-            <a:ext cx="329184" cy="329184"/>
-          </a:xfrm>
-          <a:prstGeom prst="ellipse">
-            <a:avLst/>
-          </a:prstGeom>
-          <a:solidFill>
-            <a:schemeClr val="accent1"/>
-          </a:solidFill>
-          <a:ln w="19050">
-            <a:solidFill>
-              <a:schemeClr val="bg1"/>
-            </a:solidFill>
-            <a:prstDash val="solid"/>
-          </a:ln>
-        </p:spPr>
-      </p:sp>
-      <p:sp>
-        <p:nvSpPr>
-          <p:cNvPr id="10" name="Text 7"/>
-          <p:cNvSpPr txBox="1"/>
-          <p:nvPr/>
-        </p:nvSpPr>
-        <p:spPr>
-          <a:xfrm>
-            <a:off x="457200" y="3017520"/>
-            <a:ext cx="329184" cy="329184"/>
-          </a:xfrm>
-          <a:prstGeom prst="rect">
-            <a:avLst/>
-          </a:prstGeom>
-          <a:noFill/>
-          <a:ln/>
-        </p:spPr>
-        <p:txBody>
-          <a:bodyPr wrap="square" lIns="0" tIns="0" rIns="0" bIns="0" rtlCol="0" anchor="ctr"/>
-          <a:lstStyle/>
-          <a:p>
-            <a:pPr algn="ctr" indent="0" marL="0">
-              <a:buNone/>
-            </a:pPr>
-            <a:r>
-              <a:rPr lang="en-US" sz="1400" b="1" dirty="0">
-                <a:solidFill>
-                  <a:schemeClr val="bg1"/>
-                </a:solidFill>
-              </a:rPr>
-              <a:t>2</a:t>
-            </a:r>
-            <a:endParaRPr lang="en-US" sz="1400" dirty="0"/>
-          </a:p>
-        </p:txBody>
-      </p:sp>
-      <p:sp>
-        <p:nvSpPr>
-          <p:cNvPr id="11" name="Text 8"/>
-          <p:cNvSpPr txBox="1"/>
-          <p:nvPr/>
-        </p:nvSpPr>
-        <p:spPr>
-          <a:xfrm>
-            <a:off x="914400" y="3044952"/>
-            <a:ext cx="4206240" cy="320040"/>
-          </a:xfrm>
-          <a:prstGeom prst="rect">
-            <a:avLst/>
-          </a:prstGeom>
-          <a:noFill/>
-          <a:ln/>
-        </p:spPr>
-        <p:txBody>
-          <a:bodyPr wrap="square" lIns="0" tIns="0" rIns="0" bIns="0" rtlCol="0" anchor="t"/>
-          <a:lstStyle/>
-          <a:p>
-            <a:pPr indent="0" marL="0">
-              <a:buNone/>
-            </a:pPr>
-            <a:r>
-              <a:rPr lang="en-US" sz="1200" dirty="0">
-                <a:solidFill>
-                  <a:schemeClr val="tx1"/>
-                </a:solidFill>
-              </a:rPr>
-              <a:t>「PLATEAU 3D都市モデルを読み込む」で CityGML を読み込む</a:t>
-            </a:r>
-            <a:endParaRPr lang="en-US" sz="1200" dirty="0"/>
-          </a:p>
-        </p:txBody>
-      </p:sp>
-      <p:sp>
-        <p:nvSpPr>
-          <p:cNvPr id="12" name="number 3"/>
-          <p:cNvSpPr/>
-          <p:nvPr/>
-        </p:nvSpPr>
-        <p:spPr>
-          <a:xfrm>
-            <a:off x="457200" y="3520440"/>
-            <a:ext cx="329184" cy="329184"/>
-          </a:xfrm>
-          <a:prstGeom prst="ellipse">
-            <a:avLst/>
-          </a:prstGeom>
-          <a:solidFill>
-            <a:schemeClr val="accent1"/>
-          </a:solidFill>
-          <a:ln w="19050">
-            <a:solidFill>
-              <a:schemeClr val="bg1"/>
-            </a:solidFill>
-            <a:prstDash val="solid"/>
-          </a:ln>
-        </p:spPr>
-      </p:sp>
-      <p:sp>
-        <p:nvSpPr>
-          <p:cNvPr id="13" name="Text 10"/>
-          <p:cNvSpPr txBox="1"/>
-          <p:nvPr/>
-        </p:nvSpPr>
-        <p:spPr>
-          <a:xfrm>
-            <a:off x="457200" y="3520440"/>
-            <a:ext cx="329184" cy="329184"/>
-          </a:xfrm>
-          <a:prstGeom prst="rect">
-            <a:avLst/>
-          </a:prstGeom>
-          <a:noFill/>
-          <a:ln/>
-        </p:spPr>
-        <p:txBody>
-          <a:bodyPr wrap="square" lIns="0" tIns="0" rIns="0" bIns="0" rtlCol="0" anchor="ctr"/>
-          <a:lstStyle/>
-          <a:p>
-            <a:pPr algn="ctr" indent="0" marL="0">
-              <a:buNone/>
-            </a:pPr>
-            <a:r>
-              <a:rPr lang="en-US" sz="1400" b="1" dirty="0">
-                <a:solidFill>
-                  <a:schemeClr val="bg1"/>
-                </a:solidFill>
-              </a:rPr>
-              <a:t>3</a:t>
-            </a:r>
-            <a:endParaRPr lang="en-US" sz="1400" dirty="0"/>
-          </a:p>
-        </p:txBody>
-      </p:sp>
-      <p:sp>
-        <p:nvSpPr>
-          <p:cNvPr id="14" name="Text 11"/>
-          <p:cNvSpPr txBox="1"/>
-          <p:nvPr/>
-        </p:nvSpPr>
-        <p:spPr>
-          <a:xfrm>
-            <a:off x="914400" y="3547872"/>
-            <a:ext cx="4206240" cy="320040"/>
-          </a:xfrm>
-          <a:prstGeom prst="rect">
-            <a:avLst/>
-          </a:prstGeom>
-          <a:noFill/>
-          <a:ln/>
-        </p:spPr>
-        <p:txBody>
-          <a:bodyPr wrap="square" lIns="0" tIns="0" rIns="0" bIns="0" rtlCol="0" anchor="t"/>
-          <a:lstStyle/>
-          <a:p>
-            <a:pPr indent="0" marL="0">
-              <a:buNone/>
-            </a:pPr>
-            <a:r>
-              <a:rPr lang="en-US" sz="1200" dirty="0">
-                <a:solidFill>
-                  <a:schemeClr val="tx1"/>
-                </a:solidFill>
-              </a:rPr>
-              <a:t>建物（bldg_Building）のレイヤを「建物レイヤ」か「周辺の建物」に選ぶ</a:t>
-            </a:r>
-            <a:endParaRPr lang="en-US" sz="1200" dirty="0"/>
-          </a:p>
-        </p:txBody>
-      </p:sp>
-      <p:sp>
-        <p:nvSpPr>
-          <p:cNvPr id="15" name="card"/>
-          <p:cNvSpPr/>
-          <p:nvPr/>
-        </p:nvSpPr>
-        <p:spPr>
-          <a:xfrm>
-            <a:off x="5394960" y="2423160"/>
-            <a:ext cx="3291840" cy="1600200"/>
+            <a:off x="5852160" y="1874520"/>
+            <a:ext cx="502920" cy="502920"/>
           </a:xfrm>
           <a:prstGeom prst="roundRect">
             <a:avLst>
-              <a:gd name="adj" fmla="val 4571"/>
+              <a:gd name="adj" fmla="val 22000"/>
+            </a:avLst>
+          </a:prstGeom>
+          <a:solidFill>
+            <a:schemeClr val="accent2"/>
+          </a:solidFill>
+          <a:ln/>
+        </p:spPr>
+      </p:sp>
+      <p:pic>
+        <p:nvPicPr>
+          <p:cNvPr id="10" name="Image 2" descr="FaMousePointer">    </p:cNvPr>
+          <p:cNvPicPr>
+            <a:picLocks noChangeAspect="1"/>
+          </p:cNvPicPr>
+          <p:nvPr/>
+        </p:nvPicPr>
+        <p:blipFill>
+          <a:blip r:embed="rId3"/>
+          <a:stretch>
+            <a:fillRect/>
+          </a:stretch>
+        </p:blipFill>
+        <p:spPr>
+          <a:xfrm>
+            <a:off x="5972861" y="1995221"/>
+            <a:ext cx="261518" cy="261518"/>
+          </a:xfrm>
+          <a:prstGeom prst="rect">
+            <a:avLst/>
+          </a:prstGeom>
+        </p:spPr>
+      </p:pic>
+      <p:sp>
+        <p:nvSpPr>
+          <p:cNvPr id="11" name="Text 6"/>
+          <p:cNvSpPr txBox="1"/>
+          <p:nvPr/>
+        </p:nvSpPr>
+        <p:spPr>
+          <a:xfrm>
+            <a:off x="6492240" y="1874520"/>
+            <a:ext cx="2194560" cy="274320"/>
+          </a:xfrm>
+          <a:prstGeom prst="rect">
+            <a:avLst/>
+          </a:prstGeom>
+          <a:noFill/>
+          <a:ln/>
+        </p:spPr>
+        <p:txBody>
+          <a:bodyPr wrap="square" lIns="0" tIns="0" rIns="0" bIns="0" rtlCol="0" anchor="t"/>
+          <a:lstStyle/>
+          <a:p>
+            <a:pPr indent="0" marL="0">
+              <a:buNone/>
+            </a:pPr>
+            <a:r>
+              <a:rPr lang="en-US" sz="1300" b="1" dirty="0">
+                <a:solidFill>
+                  <a:schemeClr val="tx2"/>
+                </a:solidFill>
+              </a:rPr>
+              <a:t>地図で別の建物を選ぶ</a:t>
+            </a:r>
+            <a:endParaRPr lang="en-US" sz="1300" dirty="0"/>
+          </a:p>
+        </p:txBody>
+      </p:sp>
+      <p:sp>
+        <p:nvSpPr>
+          <p:cNvPr id="12" name="Text 7"/>
+          <p:cNvSpPr txBox="1"/>
+          <p:nvPr/>
+        </p:nvSpPr>
+        <p:spPr>
+          <a:xfrm>
+            <a:off x="6492240" y="2148840"/>
+            <a:ext cx="2194560" cy="411480"/>
+          </a:xfrm>
+          <a:prstGeom prst="rect">
+            <a:avLst/>
+          </a:prstGeom>
+          <a:noFill/>
+          <a:ln/>
+        </p:spPr>
+        <p:txBody>
+          <a:bodyPr wrap="square" lIns="0" tIns="0" rIns="0" bIns="0" rtlCol="0" anchor="t"/>
+          <a:lstStyle/>
+          <a:p>
+            <a:pPr indent="0" marL="0">
+              <a:buNone/>
+            </a:pPr>
+            <a:r>
+              <a:rPr lang="en-US" sz="1100" dirty="0">
+                <a:solidFill>
+                  <a:schemeClr val="tx1"/>
+                </a:solidFill>
+              </a:rPr>
+              <a:t>正しい建物をクリックして選び直す</a:t>
+            </a:r>
+            <a:endParaRPr lang="en-US" sz="1100" dirty="0"/>
+          </a:p>
+        </p:txBody>
+      </p:sp>
+      <p:sp>
+        <p:nvSpPr>
+          <p:cNvPr id="13" name="icon tile"/>
+          <p:cNvSpPr/>
+          <p:nvPr/>
+        </p:nvSpPr>
+        <p:spPr>
+          <a:xfrm>
+            <a:off x="5852160" y="2651760"/>
+            <a:ext cx="502920" cy="502920"/>
+          </a:xfrm>
+          <a:prstGeom prst="roundRect">
+            <a:avLst>
+              <a:gd name="adj" fmla="val 22000"/>
+            </a:avLst>
+          </a:prstGeom>
+          <a:solidFill>
+            <a:schemeClr val="accent5"/>
+          </a:solidFill>
+          <a:ln/>
+        </p:spPr>
+      </p:sp>
+      <p:pic>
+        <p:nvPicPr>
+          <p:cNvPr id="14" name="Image 3" descr="FaUndo">    </p:cNvPr>
+          <p:cNvPicPr>
+            <a:picLocks noChangeAspect="1"/>
+          </p:cNvPicPr>
+          <p:nvPr/>
+        </p:nvPicPr>
+        <p:blipFill>
+          <a:blip r:embed="rId4"/>
+          <a:stretch>
+            <a:fillRect/>
+          </a:stretch>
+        </p:blipFill>
+        <p:spPr>
+          <a:xfrm>
+            <a:off x="5972861" y="2772461"/>
+            <a:ext cx="261518" cy="261518"/>
+          </a:xfrm>
+          <a:prstGeom prst="rect">
+            <a:avLst/>
+          </a:prstGeom>
+        </p:spPr>
+      </p:pic>
+      <p:sp>
+        <p:nvSpPr>
+          <p:cNvPr id="15" name="Text 9"/>
+          <p:cNvSpPr txBox="1"/>
+          <p:nvPr/>
+        </p:nvSpPr>
+        <p:spPr>
+          <a:xfrm>
+            <a:off x="6492240" y="2651760"/>
+            <a:ext cx="2194560" cy="274320"/>
+          </a:xfrm>
+          <a:prstGeom prst="rect">
+            <a:avLst/>
+          </a:prstGeom>
+          <a:noFill/>
+          <a:ln/>
+        </p:spPr>
+        <p:txBody>
+          <a:bodyPr wrap="square" lIns="0" tIns="0" rIns="0" bIns="0" rtlCol="0" anchor="t"/>
+          <a:lstStyle/>
+          <a:p>
+            <a:pPr indent="0" marL="0">
+              <a:buNone/>
+            </a:pPr>
+            <a:r>
+              <a:rPr lang="en-US" sz="1300" b="1" dirty="0">
+                <a:solidFill>
+                  <a:schemeClr val="tx2"/>
+                </a:solidFill>
+              </a:rPr>
+              <a:t>動かさない／元に戻す</a:t>
+            </a:r>
+            <a:endParaRPr lang="en-US" sz="1300" dirty="0"/>
+          </a:p>
+        </p:txBody>
+      </p:sp>
+      <p:sp>
+        <p:nvSpPr>
+          <p:cNvPr id="16" name="Text 10"/>
+          <p:cNvSpPr txBox="1"/>
+          <p:nvPr/>
+        </p:nvSpPr>
+        <p:spPr>
+          <a:xfrm>
+            <a:off x="6492240" y="2926080"/>
+            <a:ext cx="2194560" cy="411480"/>
+          </a:xfrm>
+          <a:prstGeom prst="rect">
+            <a:avLst/>
+          </a:prstGeom>
+          <a:noFill/>
+          <a:ln/>
+        </p:spPr>
+        <p:txBody>
+          <a:bodyPr wrap="square" lIns="0" tIns="0" rIns="0" bIns="0" rtlCol="0" anchor="t"/>
+          <a:lstStyle/>
+          <a:p>
+            <a:pPr indent="0" marL="0">
+              <a:buNone/>
+            </a:pPr>
+            <a:r>
+              <a:rPr lang="en-US" sz="1100" dirty="0">
+                <a:solidFill>
+                  <a:schemeClr val="tx1"/>
+                </a:solidFill>
+              </a:rPr>
+              <a:t>そのままにする・元の位置へ戻す</a:t>
+            </a:r>
+            <a:endParaRPr lang="en-US" sz="1100" dirty="0"/>
+          </a:p>
+        </p:txBody>
+      </p:sp>
+      <p:sp>
+        <p:nvSpPr>
+          <p:cNvPr id="17" name="card"/>
+          <p:cNvSpPr/>
+          <p:nvPr/>
+        </p:nvSpPr>
+        <p:spPr>
+          <a:xfrm>
+            <a:off x="5852160" y="3429000"/>
+            <a:ext cx="2834640" cy="1143000"/>
+          </a:xfrm>
+          <a:prstGeom prst="roundRect">
+            <a:avLst>
+              <a:gd name="adj" fmla="val 6400"/>
             </a:avLst>
           </a:prstGeom>
           <a:solidFill>
@@ -3612,14 +3736,14 @@
       </p:sp>
       <p:sp>
         <p:nvSpPr>
-          <p:cNvPr id="16" name="Text 13"/>
+          <p:cNvPr id="18" name="Text 12"/>
           <p:cNvSpPr txBox="1"/>
           <p:nvPr/>
         </p:nvSpPr>
         <p:spPr>
           <a:xfrm>
-            <a:off x="5577840" y="2560320"/>
-            <a:ext cx="2926080" cy="1371600"/>
+            <a:off x="5989320" y="3520440"/>
+            <a:ext cx="2560320" cy="274320"/>
           </a:xfrm>
           <a:prstGeom prst="rect">
             <a:avLst/>
@@ -3635,64 +3759,50 @@
               <a:buNone/>
             </a:pPr>
             <a:r>
-              <a:rPr lang="en-US" sz="1300" b="1" dirty="0">
+              <a:rPr lang="en-US" sz="1200" b="1" dirty="0">
                 <a:solidFill>
                   <a:schemeClr val="tx2"/>
                 </a:solidFill>
               </a:rPr>
-              <a:t>立体（LOD1）のままでもOK</a:t>
-            </a:r>
-            <a:endParaRPr lang="en-US" sz="1300" dirty="0"/>
-          </a:p>
+              <a:t>最後に「終わって照合し直す」</a:t>
+            </a:r>
+            <a:endParaRPr lang="en-US" sz="1200" dirty="0"/>
+          </a:p>
+        </p:txBody>
+      </p:sp>
+      <p:sp>
+        <p:nvSpPr>
+          <p:cNvPr id="19" name="Text 13"/>
+          <p:cNvSpPr txBox="1"/>
+          <p:nvPr/>
+        </p:nvSpPr>
+        <p:spPr>
+          <a:xfrm>
+            <a:off x="5989320" y="3840480"/>
+            <a:ext cx="2560320" cy="640080"/>
+          </a:xfrm>
+          <a:prstGeom prst="rect">
+            <a:avLst/>
+          </a:prstGeom>
+          <a:noFill/>
+          <a:ln/>
+        </p:spPr>
+        <p:txBody>
+          <a:bodyPr wrap="square" lIns="0" tIns="0" rIns="0" bIns="0" rtlCol="0" anchor="t"/>
+          <a:lstStyle/>
           <a:p>
             <a:pPr indent="0" marL="0">
               <a:buNone/>
             </a:pPr>
             <a:r>
-              <a:rPr lang="en-US" sz="1100" dirty="0">
+              <a:rPr lang="en-US" sz="1000" dirty="0">
                 <a:solidFill>
                   <a:schemeClr val="tx1"/>
                 </a:solidFill>
               </a:rPr>
-              <a:t>屋根・床・壁の面が集まった立体は、書き出すときに「真上から見た1つの形」にまとめてから立ち上げます。平面（LOD0）でも使えます。</a:t>
-            </a:r>
-            <a:endParaRPr lang="en-US" sz="1300" dirty="0"/>
-          </a:p>
-        </p:txBody>
-      </p:sp>
-      <p:sp>
-        <p:nvSpPr>
-          <p:cNvPr id="17" name="Text 14"/>
-          <p:cNvSpPr txBox="1"/>
-          <p:nvPr/>
-        </p:nvSpPr>
-        <p:spPr>
-          <a:xfrm>
-            <a:off x="457200" y="4206240"/>
-            <a:ext cx="8229600" cy="274320"/>
-          </a:xfrm>
-          <a:prstGeom prst="rect">
-            <a:avLst/>
-          </a:prstGeom>
-          <a:noFill/>
-          <a:ln/>
-        </p:spPr>
-        <p:txBody>
-          <a:bodyPr wrap="square" lIns="0" tIns="0" rIns="0" bIns="0" rtlCol="0" anchor="t"/>
-          <a:lstStyle/>
-          <a:p>
-            <a:pPr indent="0" marL="0">
-              <a:buNone/>
-            </a:pPr>
-            <a:r>
-              <a:rPr lang="en-US" sz="1100" dirty="0">
-                <a:solidFill>
-                  <a:schemeClr val="accent5"/>
-                </a:solidFill>
-              </a:rPr>
-              <a:t>出典に「PLATEAU（国土交通省）」を表示するチェックもあります</a:t>
-            </a:r>
-            <a:endParaRPr lang="en-US" sz="1100" dirty="0"/>
+              <a:t>結果を作り直し、動かした点を保存するか聞きます。次に照合したときも正しく当たります</a:t>
+            </a:r>
+            <a:endParaRPr lang="en-US" sz="1000" dirty="0"/>
           </a:p>
         </p:txBody>
       </p:sp>
@@ -3798,7 +3908,7 @@
                   <a:schemeClr val="tx2"/>
                 </a:solidFill>
               </a:rPr>
-              <a:t>今はまだできないこと・注意</a:t>
+              <a:t>PLATEAU の建物データでも使える</a:t>
             </a:r>
             <a:endParaRPr lang="en-US" sz="2800" dirty="0"/>
           </a:p>
@@ -3812,8 +3922,8 @@
         </p:nvSpPr>
         <p:spPr>
           <a:xfrm>
-            <a:off x="457200" y="1097280"/>
-            <a:ext cx="548640" cy="548640"/>
+            <a:off x="457200" y="1188720"/>
+            <a:ext cx="1005840" cy="1005840"/>
           </a:xfrm>
           <a:prstGeom prst="roundRect">
             <a:avLst>
@@ -3821,14 +3931,14 @@
             </a:avLst>
           </a:prstGeom>
           <a:solidFill>
-            <a:schemeClr val="accent5"/>
+            <a:schemeClr val="tx2"/>
           </a:solidFill>
           <a:ln/>
         </p:spPr>
       </p:sp>
       <p:pic>
         <p:nvPicPr>
-          <p:cNvPr id="4" name="Image 0" descr="FaPalette">    </p:cNvPr>
+          <p:cNvPr id="4" name="Image 0" descr="FaCity">    </p:cNvPr>
           <p:cNvPicPr>
             <a:picLocks noChangeAspect="1"/>
           </p:cNvPicPr>
@@ -3842,8 +3952,8 @@
         </p:blipFill>
         <p:spPr>
           <a:xfrm>
-            <a:off x="588874" y="1228954"/>
-            <a:ext cx="285293" cy="285293"/>
+            <a:off x="698602" y="1430122"/>
+            <a:ext cx="523037" cy="523037"/>
           </a:xfrm>
           <a:prstGeom prst="rect">
             <a:avLst/>
@@ -3858,8 +3968,119 @@
         </p:nvSpPr>
         <p:spPr>
           <a:xfrm>
-            <a:off x="1188720" y="1097280"/>
-            <a:ext cx="3246120" cy="274320"/>
+            <a:off x="1691640" y="1188720"/>
+            <a:ext cx="6949440" cy="1005840"/>
+          </a:xfrm>
+          <a:prstGeom prst="rect">
+            <a:avLst/>
+          </a:prstGeom>
+          <a:noFill/>
+          <a:ln/>
+        </p:spPr>
+        <p:txBody>
+          <a:bodyPr wrap="square" lIns="0" tIns="0" rIns="0" bIns="0" rtlCol="0" anchor="ctr"/>
+          <a:lstStyle/>
+          <a:p>
+            <a:pPr indent="0" marL="0">
+              <a:buNone/>
+            </a:pPr>
+            <a:r>
+              <a:rPr lang="en-US" sz="1400" b="1" dirty="0">
+                <a:solidFill>
+                  <a:schemeClr val="tx2"/>
+                </a:solidFill>
+              </a:rPr>
+              <a:t>国土交通省の3D都市モデル PLATEAU を、QGISに読み込んで使えます。</a:t>
+            </a:r>
+            <a:endParaRPr lang="en-US" sz="1400" dirty="0"/>
+          </a:p>
+          <a:p>
+            <a:pPr indent="0" marL="0">
+              <a:buNone/>
+            </a:pPr>
+            <a:r>
+              <a:rPr lang="en-US" sz="1400" dirty="0">
+                <a:solidFill>
+                  <a:schemeClr val="tx1"/>
+                </a:solidFill>
+              </a:rPr>
+              <a:t>高さの列は measuredHeight が自動で選ばれます。</a:t>
+            </a:r>
+            <a:endParaRPr lang="en-US" sz="1400" dirty="0"/>
+          </a:p>
+        </p:txBody>
+      </p:sp>
+      <p:sp>
+        <p:nvSpPr>
+          <p:cNvPr id="6" name="number 1"/>
+          <p:cNvSpPr/>
+          <p:nvPr/>
+        </p:nvSpPr>
+        <p:spPr>
+          <a:xfrm>
+            <a:off x="457200" y="2514600"/>
+            <a:ext cx="329184" cy="329184"/>
+          </a:xfrm>
+          <a:prstGeom prst="ellipse">
+            <a:avLst/>
+          </a:prstGeom>
+          <a:solidFill>
+            <a:schemeClr val="accent1"/>
+          </a:solidFill>
+          <a:ln w="19050">
+            <a:solidFill>
+              <a:schemeClr val="bg1"/>
+            </a:solidFill>
+            <a:prstDash val="solid"/>
+          </a:ln>
+        </p:spPr>
+      </p:sp>
+      <p:sp>
+        <p:nvSpPr>
+          <p:cNvPr id="7" name="Text 4"/>
+          <p:cNvSpPr txBox="1"/>
+          <p:nvPr/>
+        </p:nvSpPr>
+        <p:spPr>
+          <a:xfrm>
+            <a:off x="457200" y="2514600"/>
+            <a:ext cx="329184" cy="329184"/>
+          </a:xfrm>
+          <a:prstGeom prst="rect">
+            <a:avLst/>
+          </a:prstGeom>
+          <a:noFill/>
+          <a:ln/>
+        </p:spPr>
+        <p:txBody>
+          <a:bodyPr wrap="square" lIns="0" tIns="0" rIns="0" bIns="0" rtlCol="0" anchor="ctr"/>
+          <a:lstStyle/>
+          <a:p>
+            <a:pPr algn="ctr" indent="0" marL="0">
+              <a:buNone/>
+            </a:pPr>
+            <a:r>
+              <a:rPr lang="en-US" sz="1400" b="1" dirty="0">
+                <a:solidFill>
+                  <a:schemeClr val="bg1"/>
+                </a:solidFill>
+              </a:rPr>
+              <a:t>1</a:t>
+            </a:r>
+            <a:endParaRPr lang="en-US" sz="1400" dirty="0"/>
+          </a:p>
+        </p:txBody>
+      </p:sp>
+      <p:sp>
+        <p:nvSpPr>
+          <p:cNvPr id="8" name="Text 5"/>
+          <p:cNvSpPr txBox="1"/>
+          <p:nvPr/>
+        </p:nvSpPr>
+        <p:spPr>
+          <a:xfrm>
+            <a:off x="914400" y="2542032"/>
+            <a:ext cx="4206240" cy="320040"/>
           </a:xfrm>
           <a:prstGeom prst="rect">
             <a:avLst/>
@@ -3875,12 +4096,73 @@
               <a:buNone/>
             </a:pPr>
             <a:r>
+              <a:rPr lang="en-US" sz="1200" dirty="0">
+                <a:solidFill>
+                  <a:schemeClr val="tx1"/>
+                </a:solidFill>
+              </a:rPr>
+              <a:t>「PLATEAU QGIS Plugin」（国土交通省）を入れる</a:t>
+            </a:r>
+            <a:endParaRPr lang="en-US" sz="1200" dirty="0"/>
+          </a:p>
+        </p:txBody>
+      </p:sp>
+      <p:sp>
+        <p:nvSpPr>
+          <p:cNvPr id="9" name="number 2"/>
+          <p:cNvSpPr/>
+          <p:nvPr/>
+        </p:nvSpPr>
+        <p:spPr>
+          <a:xfrm>
+            <a:off x="457200" y="3017520"/>
+            <a:ext cx="329184" cy="329184"/>
+          </a:xfrm>
+          <a:prstGeom prst="ellipse">
+            <a:avLst/>
+          </a:prstGeom>
+          <a:solidFill>
+            <a:schemeClr val="accent1"/>
+          </a:solidFill>
+          <a:ln w="19050">
+            <a:solidFill>
+              <a:schemeClr val="bg1"/>
+            </a:solidFill>
+            <a:prstDash val="solid"/>
+          </a:ln>
+        </p:spPr>
+      </p:sp>
+      <p:sp>
+        <p:nvSpPr>
+          <p:cNvPr id="10" name="Text 7"/>
+          <p:cNvSpPr txBox="1"/>
+          <p:nvPr/>
+        </p:nvSpPr>
+        <p:spPr>
+          <a:xfrm>
+            <a:off x="457200" y="3017520"/>
+            <a:ext cx="329184" cy="329184"/>
+          </a:xfrm>
+          <a:prstGeom prst="rect">
+            <a:avLst/>
+          </a:prstGeom>
+          <a:noFill/>
+          <a:ln/>
+        </p:spPr>
+        <p:txBody>
+          <a:bodyPr wrap="square" lIns="0" tIns="0" rIns="0" bIns="0" rtlCol="0" anchor="ctr"/>
+          <a:lstStyle/>
+          <a:p>
+            <a:pPr algn="ctr" indent="0" marL="0">
+              <a:buNone/>
+            </a:pPr>
+            <a:r>
               <a:rPr lang="en-US" sz="1400" b="1" dirty="0">
                 <a:solidFill>
-                  <a:schemeClr val="tx2"/>
-                </a:solidFill>
-              </a:rPr>
-              <a:t>色分けは「単一」と「分類」だけ</a:t>
+                  <a:schemeClr val="bg1"/>
+                </a:solidFill>
+              </a:rPr>
+              <a:t>2</a:t>
             </a:r>
             <a:endParaRPr lang="en-US" sz="1400" dirty="0"/>
           </a:p>
@@ -3888,14 +4170,14 @@
       </p:sp>
       <p:sp>
         <p:nvSpPr>
-          <p:cNvPr id="6" name="Text 3"/>
+          <p:cNvPr id="11" name="Text 8"/>
           <p:cNvSpPr txBox="1"/>
           <p:nvPr/>
         </p:nvSpPr>
         <p:spPr>
           <a:xfrm>
-            <a:off x="1188720" y="1399032"/>
-            <a:ext cx="3246120" cy="548640"/>
+            <a:off x="914400" y="3044952"/>
+            <a:ext cx="4206240" cy="320040"/>
           </a:xfrm>
           <a:prstGeom prst="rect">
             <a:avLst/>
@@ -3911,73 +4193,146 @@
               <a:buNone/>
             </a:pPr>
             <a:r>
-              <a:rPr lang="en-US" sz="1100" dirty="0">
+              <a:rPr lang="en-US" sz="1200" dirty="0">
                 <a:solidFill>
                   <a:schemeClr val="tx1"/>
                 </a:solidFill>
               </a:rPr>
-              <a:t>QGISの「段階」「ルールベース」は、いまは単色で書き出します</a:t>
-            </a:r>
-            <a:endParaRPr lang="en-US" sz="1100" dirty="0"/>
-          </a:p>
-        </p:txBody>
-      </p:sp>
-      <p:sp>
-        <p:nvSpPr>
-          <p:cNvPr id="7" name="icon tile"/>
+              <a:t>「PLATEAU 3D都市モデルを読み込む」で CityGML を読み込む</a:t>
+            </a:r>
+            <a:endParaRPr lang="en-US" sz="1200" dirty="0"/>
+          </a:p>
+        </p:txBody>
+      </p:sp>
+      <p:sp>
+        <p:nvSpPr>
+          <p:cNvPr id="12" name="number 3"/>
           <p:cNvSpPr/>
           <p:nvPr/>
         </p:nvSpPr>
         <p:spPr>
           <a:xfrm>
-            <a:off x="4663440" y="1097280"/>
-            <a:ext cx="548640" cy="548640"/>
+            <a:off x="457200" y="3520440"/>
+            <a:ext cx="329184" cy="329184"/>
+          </a:xfrm>
+          <a:prstGeom prst="ellipse">
+            <a:avLst/>
+          </a:prstGeom>
+          <a:solidFill>
+            <a:schemeClr val="accent1"/>
+          </a:solidFill>
+          <a:ln w="19050">
+            <a:solidFill>
+              <a:schemeClr val="bg1"/>
+            </a:solidFill>
+            <a:prstDash val="solid"/>
+          </a:ln>
+        </p:spPr>
+      </p:sp>
+      <p:sp>
+        <p:nvSpPr>
+          <p:cNvPr id="13" name="Text 10"/>
+          <p:cNvSpPr txBox="1"/>
+          <p:nvPr/>
+        </p:nvSpPr>
+        <p:spPr>
+          <a:xfrm>
+            <a:off x="457200" y="3520440"/>
+            <a:ext cx="329184" cy="329184"/>
+          </a:xfrm>
+          <a:prstGeom prst="rect">
+            <a:avLst/>
+          </a:prstGeom>
+          <a:noFill/>
+          <a:ln/>
+        </p:spPr>
+        <p:txBody>
+          <a:bodyPr wrap="square" lIns="0" tIns="0" rIns="0" bIns="0" rtlCol="0" anchor="ctr"/>
+          <a:lstStyle/>
+          <a:p>
+            <a:pPr algn="ctr" indent="0" marL="0">
+              <a:buNone/>
+            </a:pPr>
+            <a:r>
+              <a:rPr lang="en-US" sz="1400" b="1" dirty="0">
+                <a:solidFill>
+                  <a:schemeClr val="bg1"/>
+                </a:solidFill>
+              </a:rPr>
+              <a:t>3</a:t>
+            </a:r>
+            <a:endParaRPr lang="en-US" sz="1400" dirty="0"/>
+          </a:p>
+        </p:txBody>
+      </p:sp>
+      <p:sp>
+        <p:nvSpPr>
+          <p:cNvPr id="14" name="Text 11"/>
+          <p:cNvSpPr txBox="1"/>
+          <p:nvPr/>
+        </p:nvSpPr>
+        <p:spPr>
+          <a:xfrm>
+            <a:off x="914400" y="3547872"/>
+            <a:ext cx="4206240" cy="320040"/>
+          </a:xfrm>
+          <a:prstGeom prst="rect">
+            <a:avLst/>
+          </a:prstGeom>
+          <a:noFill/>
+          <a:ln/>
+        </p:spPr>
+        <p:txBody>
+          <a:bodyPr wrap="square" lIns="0" tIns="0" rIns="0" bIns="0" rtlCol="0" anchor="t"/>
+          <a:lstStyle/>
+          <a:p>
+            <a:pPr indent="0" marL="0">
+              <a:buNone/>
+            </a:pPr>
+            <a:r>
+              <a:rPr lang="en-US" sz="1200" dirty="0">
+                <a:solidFill>
+                  <a:schemeClr val="tx1"/>
+                </a:solidFill>
+              </a:rPr>
+              <a:t>建物（bldg_Building）のレイヤを「建物レイヤ」か「周辺の建物」に選ぶ</a:t>
+            </a:r>
+            <a:endParaRPr lang="en-US" sz="1200" dirty="0"/>
+          </a:p>
+        </p:txBody>
+      </p:sp>
+      <p:sp>
+        <p:nvSpPr>
+          <p:cNvPr id="15" name="card"/>
+          <p:cNvSpPr/>
+          <p:nvPr/>
+        </p:nvSpPr>
+        <p:spPr>
+          <a:xfrm>
+            <a:off x="5394960" y="2423160"/>
+            <a:ext cx="3291840" cy="1600200"/>
           </a:xfrm>
           <a:prstGeom prst="roundRect">
             <a:avLst>
-              <a:gd name="adj" fmla="val 22000"/>
+              <a:gd name="adj" fmla="val 4571"/>
             </a:avLst>
           </a:prstGeom>
           <a:solidFill>
-            <a:schemeClr val="accent5"/>
+            <a:schemeClr val="bg2"/>
           </a:solidFill>
           <a:ln/>
         </p:spPr>
       </p:sp>
-      <p:pic>
-        <p:nvPicPr>
-          <p:cNvPr id="8" name="Image 1" descr="FaWifi">    </p:cNvPr>
-          <p:cNvPicPr>
-            <a:picLocks noChangeAspect="1"/>
-          </p:cNvPicPr>
-          <p:nvPr/>
-        </p:nvPicPr>
-        <p:blipFill>
-          <a:blip r:embed="rId2"/>
-          <a:stretch>
-            <a:fillRect/>
-          </a:stretch>
-        </p:blipFill>
-        <p:spPr>
-          <a:xfrm>
-            <a:off x="4795114" y="1228954"/>
-            <a:ext cx="285293" cy="285293"/>
-          </a:xfrm>
-          <a:prstGeom prst="rect">
-            <a:avLst/>
-          </a:prstGeom>
-        </p:spPr>
-      </p:pic>
-      <p:sp>
-        <p:nvSpPr>
-          <p:cNvPr id="9" name="Text 5"/>
+      <p:sp>
+        <p:nvSpPr>
+          <p:cNvPr id="16" name="Text 13"/>
           <p:cNvSpPr txBox="1"/>
           <p:nvPr/>
         </p:nvSpPr>
         <p:spPr>
           <a:xfrm>
-            <a:off x="5394960" y="1097280"/>
-            <a:ext cx="3246120" cy="274320"/>
+            <a:off x="5577840" y="2560320"/>
+            <a:ext cx="2926080" cy="1371600"/>
           </a:xfrm>
           <a:prstGeom prst="rect">
             <a:avLst/>
@@ -3993,27 +4348,41 @@
               <a:buNone/>
             </a:pPr>
             <a:r>
-              <a:rPr lang="en-US" sz="1400" b="1" dirty="0">
+              <a:rPr lang="en-US" sz="1300" b="1" dirty="0">
                 <a:solidFill>
                   <a:schemeClr val="tx2"/>
                 </a:solidFill>
               </a:rPr>
-              <a:t>背景地図はネットが必要</a:t>
-            </a:r>
-            <a:endParaRPr lang="en-US" sz="1400" dirty="0"/>
-          </a:p>
-        </p:txBody>
-      </p:sp>
-      <p:sp>
-        <p:nvSpPr>
-          <p:cNvPr id="10" name="Text 6"/>
+              <a:t>立体（LOD1）のままでもOK</a:t>
+            </a:r>
+            <a:endParaRPr lang="en-US" sz="1300" dirty="0"/>
+          </a:p>
+          <a:p>
+            <a:pPr indent="0" marL="0">
+              <a:buNone/>
+            </a:pPr>
+            <a:r>
+              <a:rPr lang="en-US" sz="1100" dirty="0">
+                <a:solidFill>
+                  <a:schemeClr val="tx1"/>
+                </a:solidFill>
+              </a:rPr>
+              <a:t>屋根・床・壁の面が集まった立体は、書き出すときに「真上から見た1つの形」にまとめてから立ち上げます。平面（LOD0）でも使えます。</a:t>
+            </a:r>
+            <a:endParaRPr lang="en-US" sz="1300" dirty="0"/>
+          </a:p>
+        </p:txBody>
+      </p:sp>
+      <p:sp>
+        <p:nvSpPr>
+          <p:cNvPr id="17" name="Text 14"/>
           <p:cNvSpPr txBox="1"/>
           <p:nvPr/>
         </p:nvSpPr>
         <p:spPr>
           <a:xfrm>
-            <a:off x="5394960" y="1399032"/>
-            <a:ext cx="3246120" cy="548640"/>
+            <a:off x="457200" y="4206240"/>
+            <a:ext cx="8229600" cy="274320"/>
           </a:xfrm>
           <a:prstGeom prst="rect">
             <a:avLst/>
@@ -4031,482 +4400,10 @@
             <a:r>
               <a:rPr lang="en-US" sz="1100" dirty="0">
                 <a:solidFill>
-                  <a:schemeClr val="tx1"/>
-                </a:solidFill>
-              </a:rPr>
-              <a:t>地理院の地図はネットから読み込みます。建物はネットがなくても表示</a:t>
-            </a:r>
-            <a:endParaRPr lang="en-US" sz="1100" dirty="0"/>
-          </a:p>
-        </p:txBody>
-      </p:sp>
-      <p:sp>
-        <p:nvSpPr>
-          <p:cNvPr id="11" name="icon tile"/>
-          <p:cNvSpPr/>
-          <p:nvPr/>
-        </p:nvSpPr>
-        <p:spPr>
-          <a:xfrm>
-            <a:off x="457200" y="2194560"/>
-            <a:ext cx="548640" cy="548640"/>
-          </a:xfrm>
-          <a:prstGeom prst="roundRect">
-            <a:avLst>
-              <a:gd name="adj" fmla="val 22000"/>
-            </a:avLst>
-          </a:prstGeom>
-          <a:solidFill>
-            <a:schemeClr val="accent5"/>
-          </a:solidFill>
-          <a:ln/>
-        </p:spPr>
-      </p:sp>
-      <p:pic>
-        <p:nvPicPr>
-          <p:cNvPr id="12" name="Image 2" descr="FaCompass">    </p:cNvPr>
-          <p:cNvPicPr>
-            <a:picLocks noChangeAspect="1"/>
-          </p:cNvPicPr>
-          <p:nvPr/>
-        </p:nvPicPr>
-        <p:blipFill>
-          <a:blip r:embed="rId3"/>
-          <a:stretch>
-            <a:fillRect/>
-          </a:stretch>
-        </p:blipFill>
-        <p:spPr>
-          <a:xfrm>
-            <a:off x="588874" y="2326234"/>
-            <a:ext cx="285293" cy="285293"/>
-          </a:xfrm>
-          <a:prstGeom prst="rect">
-            <a:avLst/>
-          </a:prstGeom>
-        </p:spPr>
-      </p:pic>
-      <p:sp>
-        <p:nvSpPr>
-          <p:cNvPr id="13" name="Text 8"/>
-          <p:cNvSpPr txBox="1"/>
-          <p:nvPr/>
-        </p:nvSpPr>
-        <p:spPr>
-          <a:xfrm>
-            <a:off x="1188720" y="2194560"/>
-            <a:ext cx="3246120" cy="274320"/>
-          </a:xfrm>
-          <a:prstGeom prst="rect">
-            <a:avLst/>
-          </a:prstGeom>
-          <a:noFill/>
-          <a:ln/>
-        </p:spPr>
-        <p:txBody>
-          <a:bodyPr wrap="square" lIns="0" tIns="0" rIns="0" bIns="0" rtlCol="0" anchor="t"/>
-          <a:lstStyle/>
-          <a:p>
-            <a:pPr indent="0" marL="0">
-              <a:buNone/>
-            </a:pPr>
-            <a:r>
-              <a:rPr lang="en-US" sz="1400" b="1" dirty="0">
-                <a:solidFill>
-                  <a:schemeClr val="tx2"/>
-                </a:solidFill>
-              </a:rPr>
-              <a:t>地図は回せない</a:t>
-            </a:r>
-            <a:endParaRPr lang="en-US" sz="1400" dirty="0"/>
-          </a:p>
-        </p:txBody>
-      </p:sp>
-      <p:sp>
-        <p:nvSpPr>
-          <p:cNvPr id="14" name="Text 9"/>
-          <p:cNvSpPr txBox="1"/>
-          <p:nvPr/>
-        </p:nvSpPr>
-        <p:spPr>
-          <a:xfrm>
-            <a:off x="1188720" y="2496312"/>
-            <a:ext cx="3246120" cy="548640"/>
-          </a:xfrm>
-          <a:prstGeom prst="rect">
-            <a:avLst/>
-          </a:prstGeom>
-          <a:noFill/>
-          <a:ln/>
-        </p:spPr>
-        <p:txBody>
-          <a:bodyPr wrap="square" lIns="0" tIns="0" rIns="0" bIns="0" rtlCol="0" anchor="t"/>
-          <a:lstStyle/>
-          <a:p>
-            <a:pPr indent="0" marL="0">
-              <a:buNone/>
-            </a:pPr>
-            <a:r>
-              <a:rPr lang="en-US" sz="1100" dirty="0">
-                <a:solidFill>
-                  <a:schemeClr val="tx1"/>
-                </a:solidFill>
-              </a:rPr>
-              <a:t>見やすさのため北を上に固定。傾きは 2D／3D ボタンだけで切り替え</a:t>
-            </a:r>
-            <a:endParaRPr lang="en-US" sz="1100" dirty="0"/>
-          </a:p>
-        </p:txBody>
-      </p:sp>
-      <p:sp>
-        <p:nvSpPr>
-          <p:cNvPr id="15" name="icon tile"/>
-          <p:cNvSpPr/>
-          <p:nvPr/>
-        </p:nvSpPr>
-        <p:spPr>
-          <a:xfrm>
-            <a:off x="4663440" y="2194560"/>
-            <a:ext cx="548640" cy="548640"/>
-          </a:xfrm>
-          <a:prstGeom prst="roundRect">
-            <a:avLst>
-              <a:gd name="adj" fmla="val 22000"/>
-            </a:avLst>
-          </a:prstGeom>
-          <a:solidFill>
-            <a:schemeClr val="accent5"/>
-          </a:solidFill>
-          <a:ln/>
-        </p:spPr>
-      </p:sp>
-      <p:pic>
-        <p:nvPicPr>
-          <p:cNvPr id="16" name="Image 3" descr="FaSave">    </p:cNvPr>
-          <p:cNvPicPr>
-            <a:picLocks noChangeAspect="1"/>
-          </p:cNvPicPr>
-          <p:nvPr/>
-        </p:nvPicPr>
-        <p:blipFill>
-          <a:blip r:embed="rId4"/>
-          <a:stretch>
-            <a:fillRect/>
-          </a:stretch>
-        </p:blipFill>
-        <p:spPr>
-          <a:xfrm>
-            <a:off x="4795114" y="2326234"/>
-            <a:ext cx="285293" cy="285293"/>
-          </a:xfrm>
-          <a:prstGeom prst="rect">
-            <a:avLst/>
-          </a:prstGeom>
-        </p:spPr>
-      </p:pic>
-      <p:sp>
-        <p:nvSpPr>
-          <p:cNvPr id="17" name="Text 11"/>
-          <p:cNvSpPr txBox="1"/>
-          <p:nvPr/>
-        </p:nvSpPr>
-        <p:spPr>
-          <a:xfrm>
-            <a:off x="5394960" y="2194560"/>
-            <a:ext cx="3246120" cy="274320"/>
-          </a:xfrm>
-          <a:prstGeom prst="rect">
-            <a:avLst/>
-          </a:prstGeom>
-          <a:noFill/>
-          <a:ln/>
-        </p:spPr>
-        <p:txBody>
-          <a:bodyPr wrap="square" lIns="0" tIns="0" rIns="0" bIns="0" rtlCol="0" anchor="t"/>
-          <a:lstStyle/>
-          <a:p>
-            <a:pPr indent="0" marL="0">
-              <a:buNone/>
-            </a:pPr>
-            <a:r>
-              <a:rPr lang="en-US" sz="1400" b="1" dirty="0">
-                <a:solidFill>
-                  <a:schemeClr val="tx2"/>
-                </a:solidFill>
-              </a:rPr>
-              <a:t>設定は保存されない</a:t>
-            </a:r>
-            <a:endParaRPr lang="en-US" sz="1400" dirty="0"/>
-          </a:p>
-        </p:txBody>
-      </p:sp>
-      <p:sp>
-        <p:nvSpPr>
-          <p:cNvPr id="18" name="Text 12"/>
-          <p:cNvSpPr txBox="1"/>
-          <p:nvPr/>
-        </p:nvSpPr>
-        <p:spPr>
-          <a:xfrm>
-            <a:off x="5394960" y="2496312"/>
-            <a:ext cx="3246120" cy="548640"/>
-          </a:xfrm>
-          <a:prstGeom prst="rect">
-            <a:avLst/>
-          </a:prstGeom>
-          <a:noFill/>
-          <a:ln/>
-        </p:spPr>
-        <p:txBody>
-          <a:bodyPr wrap="square" lIns="0" tIns="0" rIns="0" bIns="0" rtlCol="0" anchor="t"/>
-          <a:lstStyle/>
-          <a:p>
-            <a:pPr indent="0" marL="0">
-              <a:buNone/>
-            </a:pPr>
-            <a:r>
-              <a:rPr lang="en-US" sz="1100" dirty="0">
-                <a:solidFill>
-                  <a:schemeClr val="tx1"/>
-                </a:solidFill>
-              </a:rPr>
-              <a:t>ダイアログの設定は、書き出すたびに選び直します</a:t>
-            </a:r>
-            <a:endParaRPr lang="en-US" sz="1100" dirty="0"/>
-          </a:p>
-        </p:txBody>
-      </p:sp>
-      <p:sp>
-        <p:nvSpPr>
-          <p:cNvPr id="19" name="icon tile"/>
-          <p:cNvSpPr/>
-          <p:nvPr/>
-        </p:nvSpPr>
-        <p:spPr>
-          <a:xfrm>
-            <a:off x="457200" y="3291840"/>
-            <a:ext cx="548640" cy="548640"/>
-          </a:xfrm>
-          <a:prstGeom prst="roundRect">
-            <a:avLst>
-              <a:gd name="adj" fmla="val 22000"/>
-            </a:avLst>
-          </a:prstGeom>
-          <a:solidFill>
-            <a:schemeClr val="accent5"/>
-          </a:solidFill>
-          <a:ln/>
-        </p:spPr>
-      </p:sp>
-      <p:pic>
-        <p:nvPicPr>
-          <p:cNvPr id="20" name="Image 4" descr="FaExclamationTriangle">    </p:cNvPr>
-          <p:cNvPicPr>
-            <a:picLocks noChangeAspect="1"/>
-          </p:cNvPicPr>
-          <p:nvPr/>
-        </p:nvPicPr>
-        <p:blipFill>
-          <a:blip r:embed="rId5"/>
-          <a:stretch>
-            <a:fillRect/>
-          </a:stretch>
-        </p:blipFill>
-        <p:spPr>
-          <a:xfrm>
-            <a:off x="588874" y="3423514"/>
-            <a:ext cx="285293" cy="285293"/>
-          </a:xfrm>
-          <a:prstGeom prst="rect">
-            <a:avLst/>
-          </a:prstGeom>
-        </p:spPr>
-      </p:pic>
-      <p:sp>
-        <p:nvSpPr>
-          <p:cNvPr id="21" name="Text 14"/>
-          <p:cNvSpPr txBox="1"/>
-          <p:nvPr/>
-        </p:nvSpPr>
-        <p:spPr>
-          <a:xfrm>
-            <a:off x="1188720" y="3291840"/>
-            <a:ext cx="3246120" cy="274320"/>
-          </a:xfrm>
-          <a:prstGeom prst="rect">
-            <a:avLst/>
-          </a:prstGeom>
-          <a:noFill/>
-          <a:ln/>
-        </p:spPr>
-        <p:txBody>
-          <a:bodyPr wrap="square" lIns="0" tIns="0" rIns="0" bIns="0" rtlCol="0" anchor="t"/>
-          <a:lstStyle/>
-          <a:p>
-            <a:pPr indent="0" marL="0">
-              <a:buNone/>
-            </a:pPr>
-            <a:r>
-              <a:rPr lang="en-US" sz="1400" b="1" dirty="0">
-                <a:solidFill>
-                  <a:schemeClr val="tx2"/>
-                </a:solidFill>
-              </a:rPr>
-              <a:t>形が読めない建物は除外</a:t>
-            </a:r>
-            <a:endParaRPr lang="en-US" sz="1400" dirty="0"/>
-          </a:p>
-        </p:txBody>
-      </p:sp>
-      <p:sp>
-        <p:nvSpPr>
-          <p:cNvPr id="22" name="Text 15"/>
-          <p:cNvSpPr txBox="1"/>
-          <p:nvPr/>
-        </p:nvSpPr>
-        <p:spPr>
-          <a:xfrm>
-            <a:off x="1188720" y="3593592"/>
-            <a:ext cx="3246120" cy="548640"/>
-          </a:xfrm>
-          <a:prstGeom prst="rect">
-            <a:avLst/>
-          </a:prstGeom>
-          <a:noFill/>
-          <a:ln/>
-        </p:spPr>
-        <p:txBody>
-          <a:bodyPr wrap="square" lIns="0" tIns="0" rIns="0" bIns="0" rtlCol="0" anchor="t"/>
-          <a:lstStyle/>
-          <a:p>
-            <a:pPr indent="0" marL="0">
-              <a:buNone/>
-            </a:pPr>
-            <a:r>
-              <a:rPr lang="en-US" sz="1100" dirty="0">
-                <a:solidFill>
-                  <a:schemeClr val="tx1"/>
-                </a:solidFill>
-              </a:rPr>
-              <a:t>空・面でない・座標変換できないもの。除外した件数は完了画面に出ます</a:t>
-            </a:r>
-            <a:endParaRPr lang="en-US" sz="1100" dirty="0"/>
-          </a:p>
-        </p:txBody>
-      </p:sp>
-      <p:sp>
-        <p:nvSpPr>
-          <p:cNvPr id="23" name="icon tile"/>
-          <p:cNvSpPr/>
-          <p:nvPr/>
-        </p:nvSpPr>
-        <p:spPr>
-          <a:xfrm>
-            <a:off x="4663440" y="3291840"/>
-            <a:ext cx="548640" cy="548640"/>
-          </a:xfrm>
-          <a:prstGeom prst="roundRect">
-            <a:avLst>
-              <a:gd name="adj" fmla="val 22000"/>
-            </a:avLst>
-          </a:prstGeom>
-          <a:solidFill>
-            <a:schemeClr val="accent5"/>
-          </a:solidFill>
-          <a:ln/>
-        </p:spPr>
-      </p:sp>
-      <p:pic>
-        <p:nvPicPr>
-          <p:cNvPr id="24" name="Image 5" descr="FaClock">    </p:cNvPr>
-          <p:cNvPicPr>
-            <a:picLocks noChangeAspect="1"/>
-          </p:cNvPicPr>
-          <p:nvPr/>
-        </p:nvPicPr>
-        <p:blipFill>
-          <a:blip r:embed="rId6"/>
-          <a:stretch>
-            <a:fillRect/>
-          </a:stretch>
-        </p:blipFill>
-        <p:spPr>
-          <a:xfrm>
-            <a:off x="4795114" y="3423514"/>
-            <a:ext cx="285293" cy="285293"/>
-          </a:xfrm>
-          <a:prstGeom prst="rect">
-            <a:avLst/>
-          </a:prstGeom>
-        </p:spPr>
-      </p:pic>
-      <p:sp>
-        <p:nvSpPr>
-          <p:cNvPr id="25" name="Text 17"/>
-          <p:cNvSpPr txBox="1"/>
-          <p:nvPr/>
-        </p:nvSpPr>
-        <p:spPr>
-          <a:xfrm>
-            <a:off x="5394960" y="3291840"/>
-            <a:ext cx="3246120" cy="274320"/>
-          </a:xfrm>
-          <a:prstGeom prst="rect">
-            <a:avLst/>
-          </a:prstGeom>
-          <a:noFill/>
-          <a:ln/>
-        </p:spPr>
-        <p:txBody>
-          <a:bodyPr wrap="square" lIns="0" tIns="0" rIns="0" bIns="0" rtlCol="0" anchor="t"/>
-          <a:lstStyle/>
-          <a:p>
-            <a:pPr indent="0" marL="0">
-              <a:buNone/>
-            </a:pPr>
-            <a:r>
-              <a:rPr lang="en-US" sz="1400" b="1" dirty="0">
-                <a:solidFill>
-                  <a:schemeClr val="tx2"/>
-                </a:solidFill>
-              </a:rPr>
-              <a:t>あとで足す予定</a:t>
-            </a:r>
-            <a:endParaRPr lang="en-US" sz="1400" dirty="0"/>
-          </a:p>
-        </p:txBody>
-      </p:sp>
-      <p:sp>
-        <p:nvSpPr>
-          <p:cNvPr id="26" name="Text 18"/>
-          <p:cNvSpPr txBox="1"/>
-          <p:nvPr/>
-        </p:nvSpPr>
-        <p:spPr>
-          <a:xfrm>
-            <a:off x="5394960" y="3593592"/>
-            <a:ext cx="3246120" cy="548640"/>
-          </a:xfrm>
-          <a:prstGeom prst="rect">
-            <a:avLst/>
-          </a:prstGeom>
-          <a:noFill/>
-          <a:ln/>
-        </p:spPr>
-        <p:txBody>
-          <a:bodyPr wrap="square" lIns="0" tIns="0" rIns="0" bIns="0" rtlCol="0" anchor="t"/>
-          <a:lstStyle/>
-          <a:p>
-            <a:pPr indent="0" marL="0">
-              <a:buNone/>
-            </a:pPr>
-            <a:r>
-              <a:rPr lang="en-US" sz="1100" dirty="0">
-                <a:solidFill>
-                  <a:schemeClr val="tx1"/>
-                </a:solidFill>
-              </a:rPr>
-              <a:t>件数が多いときの警告、ダークモード、海外の地図など</a:t>
+                  <a:schemeClr val="accent5"/>
+                </a:solidFill>
+              </a:rPr>
+              <a:t>出典に「PLATEAU（国土交通省）」を表示するチェックもあります</a:t>
             </a:r>
             <a:endParaRPr lang="en-US" sz="1100" dirty="0"/>
           </a:p>
@@ -4568,6 +4465,822 @@
 <file path=ppt/slides/slide13.xml><?xml version="1.0" encoding="utf-8"?>
 <p:sld xmlns:a="http://schemas.openxmlformats.org/drawingml/2006/main" xmlns:r="http://schemas.openxmlformats.org/officeDocument/2006/relationships" xmlns:p="http://schemas.openxmlformats.org/presentationml/2006/main">
   <p:cSld name="Slide 13">
+    <p:spTree>
+      <p:nvGrpSpPr>
+        <p:cNvPr id="1" name=""/>
+        <p:cNvGrpSpPr/>
+        <p:nvPr/>
+      </p:nvGrpSpPr>
+      <p:grpSpPr>
+        <a:xfrm>
+          <a:off x="0" y="0"/>
+          <a:ext cx="0" cy="0"/>
+          <a:chOff x="0" y="0"/>
+          <a:chExt cx="0" cy="0"/>
+        </a:xfrm>
+      </p:grpSpPr>
+      <p:sp>
+        <p:nvSpPr>
+          <p:cNvPr id="2" name="Text 0"/>
+          <p:cNvSpPr/>
+          <p:nvPr>
+            <p:ph idx="100" type="title" hasCustomPrompt="1"/>
+          </p:nvPr>
+        </p:nvSpPr>
+        <p:spPr>
+          <a:xfrm>
+            <a:off x="457200" y="274320"/>
+            <a:ext cx="8229600" cy="640080"/>
+          </a:xfrm>
+          <a:prstGeom prst="rect">
+            <a:avLst/>
+          </a:prstGeom>
+          <a:noFill/>
+          <a:ln/>
+        </p:spPr>
+        <p:txBody>
+          <a:bodyPr wrap="square" lIns="0" tIns="0" rIns="0" bIns="0" rtlCol="0" anchor="ctr"/>
+          <a:lstStyle/>
+          <a:p>
+            <a:pPr algn="l" indent="0" marL="0">
+              <a:buNone/>
+            </a:pPr>
+            <a:r>
+              <a:rPr lang="en-US" sz="2800" b="1" dirty="0">
+                <a:solidFill>
+                  <a:schemeClr val="tx2"/>
+                </a:solidFill>
+              </a:rPr>
+              <a:t>今はまだできないこと・注意</a:t>
+            </a:r>
+            <a:endParaRPr lang="en-US" sz="2800" dirty="0"/>
+          </a:p>
+        </p:txBody>
+      </p:sp>
+      <p:sp>
+        <p:nvSpPr>
+          <p:cNvPr id="3" name="icon tile"/>
+          <p:cNvSpPr/>
+          <p:nvPr/>
+        </p:nvSpPr>
+        <p:spPr>
+          <a:xfrm>
+            <a:off x="457200" y="1097280"/>
+            <a:ext cx="548640" cy="548640"/>
+          </a:xfrm>
+          <a:prstGeom prst="roundRect">
+            <a:avLst>
+              <a:gd name="adj" fmla="val 22000"/>
+            </a:avLst>
+          </a:prstGeom>
+          <a:solidFill>
+            <a:schemeClr val="accent5"/>
+          </a:solidFill>
+          <a:ln/>
+        </p:spPr>
+      </p:sp>
+      <p:pic>
+        <p:nvPicPr>
+          <p:cNvPr id="4" name="Image 0" descr="FaPalette">    </p:cNvPr>
+          <p:cNvPicPr>
+            <a:picLocks noChangeAspect="1"/>
+          </p:cNvPicPr>
+          <p:nvPr/>
+        </p:nvPicPr>
+        <p:blipFill>
+          <a:blip r:embed="rId1"/>
+          <a:stretch>
+            <a:fillRect/>
+          </a:stretch>
+        </p:blipFill>
+        <p:spPr>
+          <a:xfrm>
+            <a:off x="588874" y="1228954"/>
+            <a:ext cx="285293" cy="285293"/>
+          </a:xfrm>
+          <a:prstGeom prst="rect">
+            <a:avLst/>
+          </a:prstGeom>
+        </p:spPr>
+      </p:pic>
+      <p:sp>
+        <p:nvSpPr>
+          <p:cNvPr id="5" name="Text 2"/>
+          <p:cNvSpPr txBox="1"/>
+          <p:nvPr/>
+        </p:nvSpPr>
+        <p:spPr>
+          <a:xfrm>
+            <a:off x="1188720" y="1097280"/>
+            <a:ext cx="3246120" cy="274320"/>
+          </a:xfrm>
+          <a:prstGeom prst="rect">
+            <a:avLst/>
+          </a:prstGeom>
+          <a:noFill/>
+          <a:ln/>
+        </p:spPr>
+        <p:txBody>
+          <a:bodyPr wrap="square" lIns="0" tIns="0" rIns="0" bIns="0" rtlCol="0" anchor="t"/>
+          <a:lstStyle/>
+          <a:p>
+            <a:pPr indent="0" marL="0">
+              <a:buNone/>
+            </a:pPr>
+            <a:r>
+              <a:rPr lang="en-US" sz="1400" b="1" dirty="0">
+                <a:solidFill>
+                  <a:schemeClr val="tx2"/>
+                </a:solidFill>
+              </a:rPr>
+              <a:t>色分けは「単一」と「分類」だけ</a:t>
+            </a:r>
+            <a:endParaRPr lang="en-US" sz="1400" dirty="0"/>
+          </a:p>
+        </p:txBody>
+      </p:sp>
+      <p:sp>
+        <p:nvSpPr>
+          <p:cNvPr id="6" name="Text 3"/>
+          <p:cNvSpPr txBox="1"/>
+          <p:nvPr/>
+        </p:nvSpPr>
+        <p:spPr>
+          <a:xfrm>
+            <a:off x="1188720" y="1399032"/>
+            <a:ext cx="3246120" cy="548640"/>
+          </a:xfrm>
+          <a:prstGeom prst="rect">
+            <a:avLst/>
+          </a:prstGeom>
+          <a:noFill/>
+          <a:ln/>
+        </p:spPr>
+        <p:txBody>
+          <a:bodyPr wrap="square" lIns="0" tIns="0" rIns="0" bIns="0" rtlCol="0" anchor="t"/>
+          <a:lstStyle/>
+          <a:p>
+            <a:pPr indent="0" marL="0">
+              <a:buNone/>
+            </a:pPr>
+            <a:r>
+              <a:rPr lang="en-US" sz="1100" dirty="0">
+                <a:solidFill>
+                  <a:schemeClr val="tx1"/>
+                </a:solidFill>
+              </a:rPr>
+              <a:t>QGISの「段階」「ルールベース」は、いまは単色で書き出します</a:t>
+            </a:r>
+            <a:endParaRPr lang="en-US" sz="1100" dirty="0"/>
+          </a:p>
+        </p:txBody>
+      </p:sp>
+      <p:sp>
+        <p:nvSpPr>
+          <p:cNvPr id="7" name="icon tile"/>
+          <p:cNvSpPr/>
+          <p:nvPr/>
+        </p:nvSpPr>
+        <p:spPr>
+          <a:xfrm>
+            <a:off x="4663440" y="1097280"/>
+            <a:ext cx="548640" cy="548640"/>
+          </a:xfrm>
+          <a:prstGeom prst="roundRect">
+            <a:avLst>
+              <a:gd name="adj" fmla="val 22000"/>
+            </a:avLst>
+          </a:prstGeom>
+          <a:solidFill>
+            <a:schemeClr val="accent5"/>
+          </a:solidFill>
+          <a:ln/>
+        </p:spPr>
+      </p:sp>
+      <p:pic>
+        <p:nvPicPr>
+          <p:cNvPr id="8" name="Image 1" descr="FaWifi">    </p:cNvPr>
+          <p:cNvPicPr>
+            <a:picLocks noChangeAspect="1"/>
+          </p:cNvPicPr>
+          <p:nvPr/>
+        </p:nvPicPr>
+        <p:blipFill>
+          <a:blip r:embed="rId2"/>
+          <a:stretch>
+            <a:fillRect/>
+          </a:stretch>
+        </p:blipFill>
+        <p:spPr>
+          <a:xfrm>
+            <a:off x="4795114" y="1228954"/>
+            <a:ext cx="285293" cy="285293"/>
+          </a:xfrm>
+          <a:prstGeom prst="rect">
+            <a:avLst/>
+          </a:prstGeom>
+        </p:spPr>
+      </p:pic>
+      <p:sp>
+        <p:nvSpPr>
+          <p:cNvPr id="9" name="Text 5"/>
+          <p:cNvSpPr txBox="1"/>
+          <p:nvPr/>
+        </p:nvSpPr>
+        <p:spPr>
+          <a:xfrm>
+            <a:off x="5394960" y="1097280"/>
+            <a:ext cx="3246120" cy="274320"/>
+          </a:xfrm>
+          <a:prstGeom prst="rect">
+            <a:avLst/>
+          </a:prstGeom>
+          <a:noFill/>
+          <a:ln/>
+        </p:spPr>
+        <p:txBody>
+          <a:bodyPr wrap="square" lIns="0" tIns="0" rIns="0" bIns="0" rtlCol="0" anchor="t"/>
+          <a:lstStyle/>
+          <a:p>
+            <a:pPr indent="0" marL="0">
+              <a:buNone/>
+            </a:pPr>
+            <a:r>
+              <a:rPr lang="en-US" sz="1400" b="1" dirty="0">
+                <a:solidFill>
+                  <a:schemeClr val="tx2"/>
+                </a:solidFill>
+              </a:rPr>
+              <a:t>背景地図はネットが必要</a:t>
+            </a:r>
+            <a:endParaRPr lang="en-US" sz="1400" dirty="0"/>
+          </a:p>
+        </p:txBody>
+      </p:sp>
+      <p:sp>
+        <p:nvSpPr>
+          <p:cNvPr id="10" name="Text 6"/>
+          <p:cNvSpPr txBox="1"/>
+          <p:nvPr/>
+        </p:nvSpPr>
+        <p:spPr>
+          <a:xfrm>
+            <a:off x="5394960" y="1399032"/>
+            <a:ext cx="3246120" cy="548640"/>
+          </a:xfrm>
+          <a:prstGeom prst="rect">
+            <a:avLst/>
+          </a:prstGeom>
+          <a:noFill/>
+          <a:ln/>
+        </p:spPr>
+        <p:txBody>
+          <a:bodyPr wrap="square" lIns="0" tIns="0" rIns="0" bIns="0" rtlCol="0" anchor="t"/>
+          <a:lstStyle/>
+          <a:p>
+            <a:pPr indent="0" marL="0">
+              <a:buNone/>
+            </a:pPr>
+            <a:r>
+              <a:rPr lang="en-US" sz="1100" dirty="0">
+                <a:solidFill>
+                  <a:schemeClr val="tx1"/>
+                </a:solidFill>
+              </a:rPr>
+              <a:t>地理院の地図はネットから読み込みます。建物はネットがなくても表示</a:t>
+            </a:r>
+            <a:endParaRPr lang="en-US" sz="1100" dirty="0"/>
+          </a:p>
+        </p:txBody>
+      </p:sp>
+      <p:sp>
+        <p:nvSpPr>
+          <p:cNvPr id="11" name="icon tile"/>
+          <p:cNvSpPr/>
+          <p:nvPr/>
+        </p:nvSpPr>
+        <p:spPr>
+          <a:xfrm>
+            <a:off x="457200" y="2194560"/>
+            <a:ext cx="548640" cy="548640"/>
+          </a:xfrm>
+          <a:prstGeom prst="roundRect">
+            <a:avLst>
+              <a:gd name="adj" fmla="val 22000"/>
+            </a:avLst>
+          </a:prstGeom>
+          <a:solidFill>
+            <a:schemeClr val="accent5"/>
+          </a:solidFill>
+          <a:ln/>
+        </p:spPr>
+      </p:sp>
+      <p:pic>
+        <p:nvPicPr>
+          <p:cNvPr id="12" name="Image 2" descr="FaCompass">    </p:cNvPr>
+          <p:cNvPicPr>
+            <a:picLocks noChangeAspect="1"/>
+          </p:cNvPicPr>
+          <p:nvPr/>
+        </p:nvPicPr>
+        <p:blipFill>
+          <a:blip r:embed="rId3"/>
+          <a:stretch>
+            <a:fillRect/>
+          </a:stretch>
+        </p:blipFill>
+        <p:spPr>
+          <a:xfrm>
+            <a:off x="588874" y="2326234"/>
+            <a:ext cx="285293" cy="285293"/>
+          </a:xfrm>
+          <a:prstGeom prst="rect">
+            <a:avLst/>
+          </a:prstGeom>
+        </p:spPr>
+      </p:pic>
+      <p:sp>
+        <p:nvSpPr>
+          <p:cNvPr id="13" name="Text 8"/>
+          <p:cNvSpPr txBox="1"/>
+          <p:nvPr/>
+        </p:nvSpPr>
+        <p:spPr>
+          <a:xfrm>
+            <a:off x="1188720" y="2194560"/>
+            <a:ext cx="3246120" cy="274320"/>
+          </a:xfrm>
+          <a:prstGeom prst="rect">
+            <a:avLst/>
+          </a:prstGeom>
+          <a:noFill/>
+          <a:ln/>
+        </p:spPr>
+        <p:txBody>
+          <a:bodyPr wrap="square" lIns="0" tIns="0" rIns="0" bIns="0" rtlCol="0" anchor="t"/>
+          <a:lstStyle/>
+          <a:p>
+            <a:pPr indent="0" marL="0">
+              <a:buNone/>
+            </a:pPr>
+            <a:r>
+              <a:rPr lang="en-US" sz="1400" b="1" dirty="0">
+                <a:solidFill>
+                  <a:schemeClr val="tx2"/>
+                </a:solidFill>
+              </a:rPr>
+              <a:t>地図は回せない</a:t>
+            </a:r>
+            <a:endParaRPr lang="en-US" sz="1400" dirty="0"/>
+          </a:p>
+        </p:txBody>
+      </p:sp>
+      <p:sp>
+        <p:nvSpPr>
+          <p:cNvPr id="14" name="Text 9"/>
+          <p:cNvSpPr txBox="1"/>
+          <p:nvPr/>
+        </p:nvSpPr>
+        <p:spPr>
+          <a:xfrm>
+            <a:off x="1188720" y="2496312"/>
+            <a:ext cx="3246120" cy="548640"/>
+          </a:xfrm>
+          <a:prstGeom prst="rect">
+            <a:avLst/>
+          </a:prstGeom>
+          <a:noFill/>
+          <a:ln/>
+        </p:spPr>
+        <p:txBody>
+          <a:bodyPr wrap="square" lIns="0" tIns="0" rIns="0" bIns="0" rtlCol="0" anchor="t"/>
+          <a:lstStyle/>
+          <a:p>
+            <a:pPr indent="0" marL="0">
+              <a:buNone/>
+            </a:pPr>
+            <a:r>
+              <a:rPr lang="en-US" sz="1100" dirty="0">
+                <a:solidFill>
+                  <a:schemeClr val="tx1"/>
+                </a:solidFill>
+              </a:rPr>
+              <a:t>見やすさのため北を上に固定。傾きは 2D／3D ボタンだけで切り替え</a:t>
+            </a:r>
+            <a:endParaRPr lang="en-US" sz="1100" dirty="0"/>
+          </a:p>
+        </p:txBody>
+      </p:sp>
+      <p:sp>
+        <p:nvSpPr>
+          <p:cNvPr id="15" name="icon tile"/>
+          <p:cNvSpPr/>
+          <p:nvPr/>
+        </p:nvSpPr>
+        <p:spPr>
+          <a:xfrm>
+            <a:off x="4663440" y="2194560"/>
+            <a:ext cx="548640" cy="548640"/>
+          </a:xfrm>
+          <a:prstGeom prst="roundRect">
+            <a:avLst>
+              <a:gd name="adj" fmla="val 22000"/>
+            </a:avLst>
+          </a:prstGeom>
+          <a:solidFill>
+            <a:schemeClr val="accent5"/>
+          </a:solidFill>
+          <a:ln/>
+        </p:spPr>
+      </p:sp>
+      <p:pic>
+        <p:nvPicPr>
+          <p:cNvPr id="16" name="Image 3" descr="FaSave">    </p:cNvPr>
+          <p:cNvPicPr>
+            <a:picLocks noChangeAspect="1"/>
+          </p:cNvPicPr>
+          <p:nvPr/>
+        </p:nvPicPr>
+        <p:blipFill>
+          <a:blip r:embed="rId4"/>
+          <a:stretch>
+            <a:fillRect/>
+          </a:stretch>
+        </p:blipFill>
+        <p:spPr>
+          <a:xfrm>
+            <a:off x="4795114" y="2326234"/>
+            <a:ext cx="285293" cy="285293"/>
+          </a:xfrm>
+          <a:prstGeom prst="rect">
+            <a:avLst/>
+          </a:prstGeom>
+        </p:spPr>
+      </p:pic>
+      <p:sp>
+        <p:nvSpPr>
+          <p:cNvPr id="17" name="Text 11"/>
+          <p:cNvSpPr txBox="1"/>
+          <p:nvPr/>
+        </p:nvSpPr>
+        <p:spPr>
+          <a:xfrm>
+            <a:off x="5394960" y="2194560"/>
+            <a:ext cx="3246120" cy="274320"/>
+          </a:xfrm>
+          <a:prstGeom prst="rect">
+            <a:avLst/>
+          </a:prstGeom>
+          <a:noFill/>
+          <a:ln/>
+        </p:spPr>
+        <p:txBody>
+          <a:bodyPr wrap="square" lIns="0" tIns="0" rIns="0" bIns="0" rtlCol="0" anchor="t"/>
+          <a:lstStyle/>
+          <a:p>
+            <a:pPr indent="0" marL="0">
+              <a:buNone/>
+            </a:pPr>
+            <a:r>
+              <a:rPr lang="en-US" sz="1400" b="1" dirty="0">
+                <a:solidFill>
+                  <a:schemeClr val="tx2"/>
+                </a:solidFill>
+              </a:rPr>
+              <a:t>設定は保存されない</a:t>
+            </a:r>
+            <a:endParaRPr lang="en-US" sz="1400" dirty="0"/>
+          </a:p>
+        </p:txBody>
+      </p:sp>
+      <p:sp>
+        <p:nvSpPr>
+          <p:cNvPr id="18" name="Text 12"/>
+          <p:cNvSpPr txBox="1"/>
+          <p:nvPr/>
+        </p:nvSpPr>
+        <p:spPr>
+          <a:xfrm>
+            <a:off x="5394960" y="2496312"/>
+            <a:ext cx="3246120" cy="548640"/>
+          </a:xfrm>
+          <a:prstGeom prst="rect">
+            <a:avLst/>
+          </a:prstGeom>
+          <a:noFill/>
+          <a:ln/>
+        </p:spPr>
+        <p:txBody>
+          <a:bodyPr wrap="square" lIns="0" tIns="0" rIns="0" bIns="0" rtlCol="0" anchor="t"/>
+          <a:lstStyle/>
+          <a:p>
+            <a:pPr indent="0" marL="0">
+              <a:buNone/>
+            </a:pPr>
+            <a:r>
+              <a:rPr lang="en-US" sz="1100" dirty="0">
+                <a:solidFill>
+                  <a:schemeClr val="tx1"/>
+                </a:solidFill>
+              </a:rPr>
+              <a:t>ダイアログの設定は、書き出すたびに選び直します</a:t>
+            </a:r>
+            <a:endParaRPr lang="en-US" sz="1100" dirty="0"/>
+          </a:p>
+        </p:txBody>
+      </p:sp>
+      <p:sp>
+        <p:nvSpPr>
+          <p:cNvPr id="19" name="icon tile"/>
+          <p:cNvSpPr/>
+          <p:nvPr/>
+        </p:nvSpPr>
+        <p:spPr>
+          <a:xfrm>
+            <a:off x="457200" y="3291840"/>
+            <a:ext cx="548640" cy="548640"/>
+          </a:xfrm>
+          <a:prstGeom prst="roundRect">
+            <a:avLst>
+              <a:gd name="adj" fmla="val 22000"/>
+            </a:avLst>
+          </a:prstGeom>
+          <a:solidFill>
+            <a:schemeClr val="accent5"/>
+          </a:solidFill>
+          <a:ln/>
+        </p:spPr>
+      </p:sp>
+      <p:pic>
+        <p:nvPicPr>
+          <p:cNvPr id="20" name="Image 4" descr="FaExclamationTriangle">    </p:cNvPr>
+          <p:cNvPicPr>
+            <a:picLocks noChangeAspect="1"/>
+          </p:cNvPicPr>
+          <p:nvPr/>
+        </p:nvPicPr>
+        <p:blipFill>
+          <a:blip r:embed="rId5"/>
+          <a:stretch>
+            <a:fillRect/>
+          </a:stretch>
+        </p:blipFill>
+        <p:spPr>
+          <a:xfrm>
+            <a:off x="588874" y="3423514"/>
+            <a:ext cx="285293" cy="285293"/>
+          </a:xfrm>
+          <a:prstGeom prst="rect">
+            <a:avLst/>
+          </a:prstGeom>
+        </p:spPr>
+      </p:pic>
+      <p:sp>
+        <p:nvSpPr>
+          <p:cNvPr id="21" name="Text 14"/>
+          <p:cNvSpPr txBox="1"/>
+          <p:nvPr/>
+        </p:nvSpPr>
+        <p:spPr>
+          <a:xfrm>
+            <a:off x="1188720" y="3291840"/>
+            <a:ext cx="3246120" cy="274320"/>
+          </a:xfrm>
+          <a:prstGeom prst="rect">
+            <a:avLst/>
+          </a:prstGeom>
+          <a:noFill/>
+          <a:ln/>
+        </p:spPr>
+        <p:txBody>
+          <a:bodyPr wrap="square" lIns="0" tIns="0" rIns="0" bIns="0" rtlCol="0" anchor="t"/>
+          <a:lstStyle/>
+          <a:p>
+            <a:pPr indent="0" marL="0">
+              <a:buNone/>
+            </a:pPr>
+            <a:r>
+              <a:rPr lang="en-US" sz="1400" b="1" dirty="0">
+                <a:solidFill>
+                  <a:schemeClr val="tx2"/>
+                </a:solidFill>
+              </a:rPr>
+              <a:t>形が読めない建物は除外</a:t>
+            </a:r>
+            <a:endParaRPr lang="en-US" sz="1400" dirty="0"/>
+          </a:p>
+        </p:txBody>
+      </p:sp>
+      <p:sp>
+        <p:nvSpPr>
+          <p:cNvPr id="22" name="Text 15"/>
+          <p:cNvSpPr txBox="1"/>
+          <p:nvPr/>
+        </p:nvSpPr>
+        <p:spPr>
+          <a:xfrm>
+            <a:off x="1188720" y="3593592"/>
+            <a:ext cx="3246120" cy="548640"/>
+          </a:xfrm>
+          <a:prstGeom prst="rect">
+            <a:avLst/>
+          </a:prstGeom>
+          <a:noFill/>
+          <a:ln/>
+        </p:spPr>
+        <p:txBody>
+          <a:bodyPr wrap="square" lIns="0" tIns="0" rIns="0" bIns="0" rtlCol="0" anchor="t"/>
+          <a:lstStyle/>
+          <a:p>
+            <a:pPr indent="0" marL="0">
+              <a:buNone/>
+            </a:pPr>
+            <a:r>
+              <a:rPr lang="en-US" sz="1100" dirty="0">
+                <a:solidFill>
+                  <a:schemeClr val="tx1"/>
+                </a:solidFill>
+              </a:rPr>
+              <a:t>空・面でない・座標変換できないもの。除外した件数は完了画面に出ます</a:t>
+            </a:r>
+            <a:endParaRPr lang="en-US" sz="1100" dirty="0"/>
+          </a:p>
+        </p:txBody>
+      </p:sp>
+      <p:sp>
+        <p:nvSpPr>
+          <p:cNvPr id="23" name="icon tile"/>
+          <p:cNvSpPr/>
+          <p:nvPr/>
+        </p:nvSpPr>
+        <p:spPr>
+          <a:xfrm>
+            <a:off x="4663440" y="3291840"/>
+            <a:ext cx="548640" cy="548640"/>
+          </a:xfrm>
+          <a:prstGeom prst="roundRect">
+            <a:avLst>
+              <a:gd name="adj" fmla="val 22000"/>
+            </a:avLst>
+          </a:prstGeom>
+          <a:solidFill>
+            <a:schemeClr val="accent5"/>
+          </a:solidFill>
+          <a:ln/>
+        </p:spPr>
+      </p:sp>
+      <p:pic>
+        <p:nvPicPr>
+          <p:cNvPr id="24" name="Image 5" descr="FaClock">    </p:cNvPr>
+          <p:cNvPicPr>
+            <a:picLocks noChangeAspect="1"/>
+          </p:cNvPicPr>
+          <p:nvPr/>
+        </p:nvPicPr>
+        <p:blipFill>
+          <a:blip r:embed="rId6"/>
+          <a:stretch>
+            <a:fillRect/>
+          </a:stretch>
+        </p:blipFill>
+        <p:spPr>
+          <a:xfrm>
+            <a:off x="4795114" y="3423514"/>
+            <a:ext cx="285293" cy="285293"/>
+          </a:xfrm>
+          <a:prstGeom prst="rect">
+            <a:avLst/>
+          </a:prstGeom>
+        </p:spPr>
+      </p:pic>
+      <p:sp>
+        <p:nvSpPr>
+          <p:cNvPr id="25" name="Text 17"/>
+          <p:cNvSpPr txBox="1"/>
+          <p:nvPr/>
+        </p:nvSpPr>
+        <p:spPr>
+          <a:xfrm>
+            <a:off x="5394960" y="3291840"/>
+            <a:ext cx="3246120" cy="274320"/>
+          </a:xfrm>
+          <a:prstGeom prst="rect">
+            <a:avLst/>
+          </a:prstGeom>
+          <a:noFill/>
+          <a:ln/>
+        </p:spPr>
+        <p:txBody>
+          <a:bodyPr wrap="square" lIns="0" tIns="0" rIns="0" bIns="0" rtlCol="0" anchor="t"/>
+          <a:lstStyle/>
+          <a:p>
+            <a:pPr indent="0" marL="0">
+              <a:buNone/>
+            </a:pPr>
+            <a:r>
+              <a:rPr lang="en-US" sz="1400" b="1" dirty="0">
+                <a:solidFill>
+                  <a:schemeClr val="tx2"/>
+                </a:solidFill>
+              </a:rPr>
+              <a:t>あとで足す予定</a:t>
+            </a:r>
+            <a:endParaRPr lang="en-US" sz="1400" dirty="0"/>
+          </a:p>
+        </p:txBody>
+      </p:sp>
+      <p:sp>
+        <p:nvSpPr>
+          <p:cNvPr id="26" name="Text 18"/>
+          <p:cNvSpPr txBox="1"/>
+          <p:nvPr/>
+        </p:nvSpPr>
+        <p:spPr>
+          <a:xfrm>
+            <a:off x="5394960" y="3593592"/>
+            <a:ext cx="3246120" cy="548640"/>
+          </a:xfrm>
+          <a:prstGeom prst="rect">
+            <a:avLst/>
+          </a:prstGeom>
+          <a:noFill/>
+          <a:ln/>
+        </p:spPr>
+        <p:txBody>
+          <a:bodyPr wrap="square" lIns="0" tIns="0" rIns="0" bIns="0" rtlCol="0" anchor="t"/>
+          <a:lstStyle/>
+          <a:p>
+            <a:pPr indent="0" marL="0">
+              <a:buNone/>
+            </a:pPr>
+            <a:r>
+              <a:rPr lang="en-US" sz="1100" dirty="0">
+                <a:solidFill>
+                  <a:schemeClr val="tx1"/>
+                </a:solidFill>
+              </a:rPr>
+              <a:t>件数が多いときの警告、ダークモード、海外の地図など</a:t>
+            </a:r>
+            <a:endParaRPr lang="en-US" sz="1100" dirty="0"/>
+          </a:p>
+        </p:txBody>
+      </p:sp>
+      <p:sp>
+        <p:nvSpPr>
+          <p:cNvPr id="25" name="Slide Number Placeholder 0"/>
+          <p:cNvSpPr>
+            <a:spLocks noGrp="1"/>
+          </p:cNvSpPr>
+          <p:nvPr>
+            <p:ph type="sldNum" sz="quarter" idx="4294967295"/>
+          </p:nvPr>
+        </p:nvSpPr>
+        <p:spPr>
+          <a:xfrm>
+            <a:off x="8321040" y="4800600"/>
+            <a:ext cx="457200" cy="228600"/>
+          </a:xfrm>
+          <a:prstGeom prst="rect">
+            <a:avLst/>
+          </a:prstGeom>
+          <a:extLst>
+            <a:ext uri="{C572A759-6A51-4108-AA02-DFA0A04FC94B}">
+              <ma14:wrappingTextBoxFlag xmlns:ma14="http://schemas.microsoft.com/office/mac/drawingml/2011/main" val="0"/>
+            </a:ext>
+          </a:extLst>
+        </p:spPr>
+        <p:txBody>
+          <a:bodyPr/>
+          <a:lstStyle>
+            <a:lvl1pPr>
+              <a:defRPr sz="1000">
+                <a:solidFill>
+                  <a:schemeClr val="accent5"/>
+                </a:solidFill>
+              </a:defRPr>
+            </a:lvl1pPr>
+          </a:lstStyle>
+          <a:p>
+            <a:pPr algn="r"/>
+            <a:fld id="{F7021451-1387-4CA6-816F-3879F97B5CBC}" type="slidenum">
+              <a:rPr b="0" lang="en-US"/>
+              <a:t>13</a:t>
+            </a:fld>
+            <a:endParaRPr lang="en-US"/>
+          </a:p>
+        </p:txBody>
+      </p:sp>
+    </p:spTree>
+  </p:cSld>
+  <p:clrMapOvr>
+    <a:masterClrMapping/>
+  </p:clrMapOvr>
+</p:sld>
+</file>
+
+<file path=ppt/slides/slide14.xml><?xml version="1.0" encoding="utf-8"?>
+<p:sld xmlns:a="http://schemas.openxmlformats.org/drawingml/2006/main" xmlns:r="http://schemas.openxmlformats.org/officeDocument/2006/relationships" xmlns:p="http://schemas.openxmlformats.org/presentationml/2006/main">
+  <p:cSld name="Slide 14">
     <p:spTree>
       <p:nvGrpSpPr>
         <p:cNvPr id="1" name=""/>
